--- a/library/lectures/lec-07/rework/deck/tri-kadra-dopuska.pptx
+++ b/library/lectures/lec-07/rework/deck/tri-kadra-dopuska.pptx
@@ -723,7 +723,7 @@
           <a:lstStyle/>
           <a:p>
             <a:r>
-              <a:t>Числа этого кадра сняты с таблицы регулятора напрямую, разбором страницы, а не взяты из отраслевой сводки — это важно, потому что сводки по этому предмету расходятся между собой на сотни изделий. В списке FDA на 17 октября 2026 года — 1 614 изделий с ИИ или машинным обучением. Знаменатель дальше везде этот, и его стоит произнести один раз громко: все доли ниже считаны от 1 614.</a:t>
+              <a:t>Числа сняты с таблицы регулятора напрямую, прямым чтением страницы, а не взяты из отраслевой сводки — это важно, потому что сводки по этому предмету расходятся между собой на сотни изделий. В списке FDA на 17 октября 2026 года — 1 614 изделий с ИИ или машинным обучением. Знаменатель дальше везде этот, и его стоит произнести один раз громко: все доли ниже считаны от 1 614.</a:t>
             </a:r>
           </a:p>
           <a:p>
@@ -743,7 +743,7 @@
           </a:p>
           <a:p>
             <a:r>
-              <a:t>Структура по специальностям объясняет, что такое «ИИ в медицине» на самом деле. Радиология — 1 230 изделий, 76,2%. Кардиология — 154, это 9,5%. Неврология — 73, 4,5%. Дальше идут анестезиология, гастроэнтерология, гематология, патология, офтальмология, хирургия и клиническая химия — у каждой от 9 до 30 изделий. Психиатрии в списке нет ни одного изделия за всю историю. То есть ИИ в медицине на 2026 год — это преимущественно разбор изображений, и остальные специальности вместе не дают и четверти.</a:t>
+              <a:t>Структура по специальностям объясняет, что такое «ИИ в медицине» на самом деле. Радиология — 1 230 изделий, 76,2%. Кардиология — 154, это 9,5%. Неврология — 73, 4,5%. Дальше идут анестезиология, гастроэнтерология, гематология, патология, офтальмология, хирургия и клиническая химия — у каждой от 9 до 30 изделий. Психиатрии в списке нет ни одного изделия за всю историю. То есть ИИ в медицине на 2026 год — это преимущественно работа с изображениями, и остальные специальности вместе не дают и четверти.</a:t>
             </a:r>
           </a:p>
           <a:p>
@@ -773,7 +773,7 @@
           </a:p>
           <a:p>
             <a:r>
-              <a:t>Страновой перечень на кадре требует отдельной оговорки, и она важнее самих цифр. Каждая строка считана по собственному признаку новизны, потому что единого международного определения «реально нового изделия» не существует. Корея: 88 изделий из 549 кумулятивно на первый квартал 2026 года, признак — добровольный инновационный статус, который регулятор присваивает сам; на 51,7 миллиона населения выходит 1,70. Если взять другой корейский признак — прошло ли изделие возмещение по страховке, — остаётся 49 из 549, и показатель падает до 0,95. Два честных числа по одной стране, разные критерии. Китай: 118 изделий из 154 прошли собственное клиническое испытание как путь допуска, по классу высокого риска отдельно — 116 из 123; на 1 409 миллионов населения это 0,08. Япония: около 14 из 51, и это экстраполяция общей доли по всем программным медизделиям на подмножество с ИИ, а не прямой подсчёт. США: 61 из 1 614 на 342 миллиона населения — 0,18.</a:t>
+              <a:t>Страновой перечень требует отдельной оговорки, и она важнее самих цифр. Каждая строка считана по собственному признаку новизны, потому что единого международного определения «реально нового изделия» не существует. Корея: 88 изделий из 549 кумулятивно на первый квартал 2026 года, признак — добровольный инновационный статус, который регулятор присваивает сам; на 51,7 миллиона населения выходит 1,70. Если взять другой корейский признак — прошло ли изделие возмещение по страховке, — остаётся 49 из 549, и показатель падает до 0,95. Два честных числа по одной стране, разные критерии. Китай: 118 изделий из 154 прошли собственное клиническое испытание как путь допуска, по классу высокого риска отдельно — 116 из 123; на 1 409 миллионов населения это 0,08. Япония: около 14 из 51, и это экстраполяция общей доли по всем программным медизделиям на подмножество с ИИ, а не прямой подсчёт. США: 61 из 1 614 на 342 миллиона населения — 0,18.</a:t>
             </a:r>
           </a:p>
           <a:p>
@@ -783,7 +783,7 @@
           </a:p>
           <a:p>
             <a:r>
-              <a:t>Российская строка стоит на другом признаке, и это надо сказать залу прямо. Росздравнадзор не публикует разбивку «сколько изделий прошли испытания с участием человека, а сколько разбор по документам», поэтому в числителе стоят все 57 зарегистрированных изделий, а на 146 миллионов населения это даёт 0,39. Признак новизны к ним не применён — его нечем применить. Достоверно известно про первые два российских изделия 2020 года, Webiomed и Botkin.AI: аналогов в реестре у них не было, и оба прошли полноценные клинические испытания с участием пациентов. К 2026 году в реестре накопилось больше десяти продуктов разбора изображений, и для новых заявок той же товарной категории доказательная база по документам уже существует. Значит, строка 0,39 сравнима с остальными по способу счёта только условно, и приравнивать 57 российских изделий к 57 «реально новым» в американском смысле неверно.</a:t>
+              <a:t>Российская строка стоит на другом признаке, и это надо сказать залу прямо. Росздравнадзор не публикует разбивку «сколько изделий прошли испытания с участием человека, а сколько оценку по документам», поэтому в числителе стоят все 57 зарегистрированных изделий, а на 146 миллионов населения это даёт 0,39. Признак новизны к ним не применён — его нечем применить. Достоверно известно про первые два российских изделия 2020 года, Webiomed и Botkin.AI: аналогов в реестре у них не было, и оба прошли полноценные клинические испытания с участием пациентов. К 2026 году в реестре накопилось больше десяти продуктов анализа медицинских изображений, и для новых заявок той же товарной категории доказательная база по документам уже существует. Значит, строка 0,39 сравнима с остальными по способу счёта только условно, и приравнивать 57 российских изделий к 57 «реально новым» в американском смысле неверно.</a:t>
             </a:r>
           </a:p>
           <a:p>
@@ -1002,7 +1002,7 @@
           </a:p>
           <a:p>
             <a:r>
-              <a:t>Последняя пара чисел — про разрыв между допуском и оплатой, и он везде измеряется порядком величины, а не процентами. США: 1 614 одобренных алгоритмов, код оплаты хоть какой-то есть у 26, постоянный с гарантированной оплатой — у трёх. Корея: 549 допущенных, возмещение получили 49, то есть 500 изделий допущены и остались вне страховки. Германия: постоянно или предварительно оплачиваются 56–59 цифровых приложений, но знаменателя поданных заявок в открытых источниках нет. Франция: три устройства телемониторинга получили возмещение, и все мобильные приложения отклонены — для целого класса это ноль. Германскую и французскую строки я называю без доли намеренно: знаменателя у них не опубликовано, и доля от неизвестного знаменателя ничего не измеряет.</a:t>
+              <a:t>Последние два числа — про разрыв между допуском и оплатой, и он везде измеряется порядком величины, а не процентами. США: 1 614 одобренных алгоритмов, код оплаты хоть какой-то есть у 26, постоянный с гарантированной оплатой — у трёх. Корея: 549 допущенных, возмещение получили 49, то есть 500 изделий допущены и остались вне страховки. Германия: постоянно или предварительно оплачиваются 56–59 цифровых приложений, но знаменателя поданных заявок в открытых источниках нет. Франция: три устройства телемониторинга получили возмещение, и все мобильные приложения отклонены — для целого класса это ноль. Германскую и французскую строки я называю без доли намеренно: знаменателя у них не опубликовано, и доля от неизвестного знаменателя ничего не измеряет.</a:t>
             </a:r>
           </a:p>
           <a:p>
@@ -4225,11 +4225,11 @@
         <p:spPr>
           <a:xfrm>
             <a:off x="502920" y="1335024"/>
-            <a:ext cx="3618890" cy="1556177"/>
+            <a:ext cx="5510631" cy="1376997"/>
           </a:xfrm>
           <a:prstGeom prst="roundRect">
             <a:avLst>
-              <a:gd name="adj" fmla="val 19586"/>
+              <a:gd name="adj" fmla="val 22135"/>
             </a:avLst>
           </a:prstGeom>
           <a:solidFill>
@@ -4259,7 +4259,7 @@
         <p:spPr>
           <a:xfrm>
             <a:off x="640080" y="1472184"/>
-            <a:ext cx="3344570" cy="253191"/>
+            <a:ext cx="5236311" cy="253191"/>
           </a:xfrm>
           <a:prstGeom prst="rect">
             <a:avLst/>
@@ -4298,7 +4298,7 @@
         <p:spPr>
           <a:xfrm>
             <a:off x="640080" y="1725375"/>
-            <a:ext cx="3344570" cy="817422"/>
+            <a:ext cx="5236311" cy="426999"/>
           </a:xfrm>
           <a:prstGeom prst="rect">
             <a:avLst/>
@@ -4336,8 +4336,8 @@
         </p:nvSpPr>
         <p:spPr>
           <a:xfrm>
-            <a:off x="640080" y="2542797"/>
-            <a:ext cx="3344570" cy="211243"/>
+            <a:off x="640080" y="2152374"/>
+            <a:ext cx="5236311" cy="211243"/>
           </a:xfrm>
           <a:prstGeom prst="rect">
             <a:avLst/>
@@ -4375,163 +4375,12 @@
         </p:nvSpPr>
         <p:spPr>
           <a:xfrm>
-            <a:off x="4286402" y="1335024"/>
-            <a:ext cx="3618890" cy="1556177"/>
+            <a:off x="6178143" y="1335024"/>
+            <a:ext cx="5510631" cy="1376997"/>
           </a:xfrm>
           <a:prstGeom prst="roundRect">
             <a:avLst>
-              <a:gd name="adj" fmla="val 19586"/>
-            </a:avLst>
-          </a:prstGeom>
-          <a:solidFill>
-            <a:srgbClr val="F4F7FA"/>
-          </a:solidFill>
-          <a:ln w="15240">
-            <a:solidFill>
-              <a:srgbClr val="1C7293"/>
-            </a:solidFill>
-          </a:ln>
-          <a:effectLst/>
-        </p:spPr>
-        <p:txBody>
-          <a:bodyPr rtlCol="0" anchor="ctr"/>
-          <a:lstStyle/>
-          <a:p>
-            <a:pPr algn="ctr"/>
-          </a:p>
-        </p:txBody>
-      </p:sp>
-      <p:sp>
-        <p:nvSpPr>
-          <p:cNvPr id="9" name="TextBox 8"/>
-          <p:cNvSpPr txBox="1"/>
-          <p:nvPr/>
-        </p:nvSpPr>
-        <p:spPr>
-          <a:xfrm>
-            <a:off x="4423562" y="1472184"/>
-            <a:ext cx="3344570" cy="253191"/>
-          </a:xfrm>
-          <a:prstGeom prst="rect">
-            <a:avLst/>
-          </a:prstGeom>
-          <a:noFill/>
-        </p:spPr>
-        <p:txBody>
-          <a:bodyPr wrap="square" lIns="0" rIns="0" tIns="0" bIns="0" anchor="t">
-            <a:spAutoFit/>
-          </a:bodyPr>
-          <a:lstStyle/>
-          <a:p>
-            <a:pPr algn="l">
-              <a:lnSpc>
-                <a:spcPct val="110000"/>
-              </a:lnSpc>
-            </a:pPr>
-            <a:r>
-              <a:rPr sz="1200" b="1" i="0">
-                <a:solidFill>
-                  <a:srgbClr val="1C7293"/>
-                </a:solidFill>
-                <a:latin typeface="Arial"/>
-              </a:rPr>
-              <a:t>ПОШЛИНА ЗА ЭКСПЕРТИЗУ, РОССИЯ</a:t>
-            </a:r>
-          </a:p>
-        </p:txBody>
-      </p:sp>
-      <p:sp>
-        <p:nvSpPr>
-          <p:cNvPr id="10" name="TextBox 9"/>
-          <p:cNvSpPr txBox="1"/>
-          <p:nvPr/>
-        </p:nvSpPr>
-        <p:spPr>
-          <a:xfrm>
-            <a:off x="4423562" y="1725375"/>
-            <a:ext cx="3344570" cy="817422"/>
-          </a:xfrm>
-          <a:prstGeom prst="rect">
-            <a:avLst/>
-          </a:prstGeom>
-          <a:noFill/>
-        </p:spPr>
-        <p:txBody>
-          <a:bodyPr wrap="square" lIns="0" rIns="0" tIns="0" bIns="0" anchor="t">
-            <a:spAutoFit/>
-          </a:bodyPr>
-          <a:lstStyle/>
-          <a:p>
-            <a:pPr algn="l">
-              <a:lnSpc>
-                <a:spcPct val="108000"/>
-              </a:lnSpc>
-            </a:pPr>
-            <a:r>
-              <a:rPr sz="2300" b="1" i="0">
-                <a:solidFill>
-                  <a:srgbClr val="21295C"/>
-                </a:solidFill>
-                <a:latin typeface="Arial"/>
-              </a:rPr>
-              <a:t>72 · 104 · 136 · 184 тысячи рублей</a:t>
-            </a:r>
-          </a:p>
-        </p:txBody>
-      </p:sp>
-      <p:sp>
-        <p:nvSpPr>
-          <p:cNvPr id="11" name="TextBox 10"/>
-          <p:cNvSpPr txBox="1"/>
-          <p:nvPr/>
-        </p:nvSpPr>
-        <p:spPr>
-          <a:xfrm>
-            <a:off x="4423562" y="2542797"/>
-            <a:ext cx="3344570" cy="211243"/>
-          </a:xfrm>
-          <a:prstGeom prst="rect">
-            <a:avLst/>
-          </a:prstGeom>
-          <a:noFill/>
-        </p:spPr>
-        <p:txBody>
-          <a:bodyPr wrap="square" lIns="0" rIns="0" tIns="0" bIns="0" anchor="t">
-            <a:spAutoFit/>
-          </a:bodyPr>
-          <a:lstStyle/>
-          <a:p>
-            <a:pPr algn="l">
-              <a:lnSpc>
-                <a:spcPct val="112000"/>
-              </a:lnSpc>
-            </a:pPr>
-            <a:r>
-              <a:rPr sz="1200" b="0" i="1">
-                <a:solidFill>
-                  <a:srgbClr val="1C7293"/>
-                </a:solidFill>
-                <a:latin typeface="Arial"/>
-              </a:rPr>
-              <a:t>классы 1 · 2а · 2б · 3</a:t>
-            </a:r>
-          </a:p>
-        </p:txBody>
-      </p:sp>
-      <p:sp>
-        <p:nvSpPr>
-          <p:cNvPr id="12" name="Rounded Rectangle 11"/>
-          <p:cNvSpPr/>
-          <p:nvPr/>
-        </p:nvSpPr>
-        <p:spPr>
-          <a:xfrm>
-            <a:off x="8069884" y="1335024"/>
-            <a:ext cx="3618890" cy="1556177"/>
-          </a:xfrm>
-          <a:prstGeom prst="roundRect">
-            <a:avLst>
-              <a:gd name="adj" fmla="val 19586"/>
+              <a:gd name="adj" fmla="val 22135"/>
             </a:avLst>
           </a:prstGeom>
           <a:solidFill>
@@ -4554,14 +4403,14 @@
       </p:sp>
       <p:sp>
         <p:nvSpPr>
-          <p:cNvPr id="13" name="TextBox 12"/>
+          <p:cNvPr id="9" name="TextBox 8"/>
           <p:cNvSpPr txBox="1"/>
           <p:nvPr/>
         </p:nvSpPr>
         <p:spPr>
           <a:xfrm>
-            <a:off x="8207044" y="1472184"/>
-            <a:ext cx="3344570" cy="253191"/>
+            <a:off x="6315303" y="1472184"/>
+            <a:ext cx="5236311" cy="253191"/>
           </a:xfrm>
           <a:prstGeom prst="rect">
             <a:avLst/>
@@ -4586,21 +4435,21 @@
                 </a:solidFill>
                 <a:latin typeface="Arial"/>
               </a:rPr>
-              <a:t>КОРОТКИЙ ПУТЬ В РОССИИ</a:t>
-            </a:r>
-          </a:p>
-        </p:txBody>
-      </p:sp>
-      <p:sp>
-        <p:nvSpPr>
-          <p:cNvPr id="14" name="TextBox 13"/>
+              <a:t>РЕГИСТРАЦИЯ В РОССИИ ЦЕЛИКОМ</a:t>
+            </a:r>
+          </a:p>
+        </p:txBody>
+      </p:sp>
+      <p:sp>
+        <p:nvSpPr>
+          <p:cNvPr id="10" name="TextBox 9"/>
           <p:cNvSpPr txBox="1"/>
           <p:nvPr/>
         </p:nvSpPr>
         <p:spPr>
           <a:xfrm>
-            <a:off x="8207044" y="1725375"/>
-            <a:ext cx="3344570" cy="426999"/>
+            <a:off x="6315303" y="1725375"/>
+            <a:ext cx="5236311" cy="426999"/>
           </a:xfrm>
           <a:prstGeom prst="rect">
             <a:avLst/>
@@ -4625,21 +4474,21 @@
                 </a:solidFill>
                 <a:latin typeface="Arial"/>
               </a:rPr>
-              <a:t>его нет</a:t>
-            </a:r>
-          </a:p>
-        </p:txBody>
-      </p:sp>
-      <p:sp>
-        <p:nvSpPr>
-          <p:cNvPr id="15" name="TextBox 14"/>
+              <a:t>0,6–3 млн рублей</a:t>
+            </a:r>
+          </a:p>
+        </p:txBody>
+      </p:sp>
+      <p:sp>
+        <p:nvSpPr>
+          <p:cNvPr id="11" name="TextBox 10"/>
           <p:cNvSpPr txBox="1"/>
           <p:nvPr/>
         </p:nvSpPr>
         <p:spPr>
           <a:xfrm>
-            <a:off x="8207044" y="2152374"/>
-            <a:ext cx="3344570" cy="422486"/>
+            <a:off x="6315303" y="2152374"/>
+            <a:ext cx="5236311" cy="422486"/>
           </a:xfrm>
           <a:prstGeom prst="rect">
             <a:avLst/>
@@ -4664,21 +4513,21 @@
                 </a:solidFill>
                 <a:latin typeface="Arial"/>
               </a:rPr>
-              <a:t>экспертиза по существу обязательна всем классам</a:t>
-            </a:r>
-          </a:p>
-        </p:txBody>
-      </p:sp>
-      <p:sp>
-        <p:nvSpPr>
-          <p:cNvPr id="16" name="TextBox 15"/>
+              <a:t>класс 1 → класс 3; госпошлина 72–184 тысячи — её часть. Оценка регистратора</a:t>
+            </a:r>
+          </a:p>
+        </p:txBody>
+      </p:sp>
+      <p:sp>
+        <p:nvSpPr>
+          <p:cNvPr id="12" name="TextBox 11"/>
           <p:cNvSpPr txBox="1"/>
           <p:nvPr/>
         </p:nvSpPr>
         <p:spPr>
           <a:xfrm>
-            <a:off x="502920" y="3110657"/>
-            <a:ext cx="1307592" cy="639889"/>
+            <a:off x="502920" y="2931477"/>
+            <a:ext cx="1307592" cy="402240"/>
           </a:xfrm>
           <a:prstGeom prst="rect">
             <a:avLst/>
@@ -4703,21 +4552,21 @@
                 </a:solidFill>
                 <a:latin typeface="Arial"/>
               </a:rPr>
-              <a:t>США, короткий путь</a:t>
-            </a:r>
-          </a:p>
-        </p:txBody>
-      </p:sp>
-      <p:sp>
-        <p:nvSpPr>
-          <p:cNvPr id="17" name="Rounded Rectangle 16"/>
+              <a:t>США, короткий</a:t>
+            </a:r>
+          </a:p>
+        </p:txBody>
+      </p:sp>
+      <p:sp>
+        <p:nvSpPr>
+          <p:cNvPr id="13" name="Rounded Rectangle 12"/>
           <p:cNvSpPr/>
           <p:nvPr/>
         </p:nvSpPr>
         <p:spPr>
           <a:xfrm>
-            <a:off x="1920240" y="3074081"/>
-            <a:ext cx="3073298" cy="713041"/>
+            <a:off x="1920240" y="2894901"/>
+            <a:ext cx="3073298" cy="475392"/>
           </a:xfrm>
           <a:prstGeom prst="roundRect">
             <a:avLst>
@@ -4744,14 +4593,14 @@
       </p:sp>
       <p:sp>
         <p:nvSpPr>
-          <p:cNvPr id="18" name="TextBox 17"/>
+          <p:cNvPr id="14" name="TextBox 13"/>
           <p:cNvSpPr txBox="1"/>
           <p:nvPr/>
         </p:nvSpPr>
         <p:spPr>
           <a:xfrm>
-            <a:off x="2002536" y="3119801"/>
-            <a:ext cx="2908706" cy="621601"/>
+            <a:off x="2002536" y="2940621"/>
+            <a:ext cx="2908706" cy="383952"/>
           </a:xfrm>
           <a:prstGeom prst="rect">
             <a:avLst/>
@@ -4783,13 +4632,13 @@
       </p:sp>
       <p:sp>
         <p:nvSpPr>
-          <p:cNvPr id="19" name="Right Arrow 18"/>
+          <p:cNvPr id="15" name="Right Arrow 14"/>
           <p:cNvSpPr/>
           <p:nvPr/>
         </p:nvSpPr>
         <p:spPr>
           <a:xfrm>
-            <a:off x="5039258" y="3362022"/>
+            <a:off x="5039258" y="3064017"/>
             <a:ext cx="182880" cy="137160"/>
           </a:xfrm>
           <a:prstGeom prst="rightArrow">
@@ -4813,14 +4662,14 @@
       </p:sp>
       <p:sp>
         <p:nvSpPr>
-          <p:cNvPr id="20" name="Rounded Rectangle 19"/>
+          <p:cNvPr id="16" name="Rounded Rectangle 15"/>
           <p:cNvSpPr/>
           <p:nvPr/>
         </p:nvSpPr>
         <p:spPr>
           <a:xfrm>
-            <a:off x="5267858" y="3074081"/>
-            <a:ext cx="3073298" cy="713041"/>
+            <a:off x="5267858" y="2894901"/>
+            <a:ext cx="3073298" cy="475392"/>
           </a:xfrm>
           <a:prstGeom prst="roundRect">
             <a:avLst>
@@ -4847,14 +4696,14 @@
       </p:sp>
       <p:sp>
         <p:nvSpPr>
-          <p:cNvPr id="21" name="TextBox 20"/>
+          <p:cNvPr id="17" name="TextBox 16"/>
           <p:cNvSpPr txBox="1"/>
           <p:nvPr/>
         </p:nvSpPr>
         <p:spPr>
           <a:xfrm>
-            <a:off x="5350154" y="3119801"/>
-            <a:ext cx="2908706" cy="621601"/>
+            <a:off x="5350154" y="2940621"/>
+            <a:ext cx="2908706" cy="383952"/>
           </a:xfrm>
           <a:prstGeom prst="rect">
             <a:avLst/>
@@ -4886,13 +4735,13 @@
       </p:sp>
       <p:sp>
         <p:nvSpPr>
-          <p:cNvPr id="22" name="Right Arrow 21"/>
+          <p:cNvPr id="18" name="Right Arrow 17"/>
           <p:cNvSpPr/>
           <p:nvPr/>
         </p:nvSpPr>
         <p:spPr>
           <a:xfrm>
-            <a:off x="8386876" y="3362022"/>
+            <a:off x="8386876" y="3064017"/>
             <a:ext cx="182880" cy="137160"/>
           </a:xfrm>
           <a:prstGeom prst="rightArrow">
@@ -4916,14 +4765,14 @@
       </p:sp>
       <p:sp>
         <p:nvSpPr>
-          <p:cNvPr id="23" name="Rounded Rectangle 22"/>
+          <p:cNvPr id="19" name="Rounded Rectangle 18"/>
           <p:cNvSpPr/>
           <p:nvPr/>
         </p:nvSpPr>
         <p:spPr>
           <a:xfrm>
-            <a:off x="8615476" y="3074081"/>
-            <a:ext cx="3073298" cy="713041"/>
+            <a:off x="8615476" y="2894901"/>
+            <a:ext cx="3073298" cy="475392"/>
           </a:xfrm>
           <a:prstGeom prst="roundRect">
             <a:avLst>
@@ -4950,14 +4799,14 @@
       </p:sp>
       <p:sp>
         <p:nvSpPr>
-          <p:cNvPr id="24" name="TextBox 23"/>
+          <p:cNvPr id="20" name="TextBox 19"/>
           <p:cNvSpPr txBox="1"/>
           <p:nvPr/>
         </p:nvSpPr>
         <p:spPr>
           <a:xfrm>
-            <a:off x="8697772" y="3119801"/>
-            <a:ext cx="2908706" cy="621601"/>
+            <a:off x="8697772" y="2940621"/>
+            <a:ext cx="2908706" cy="383952"/>
           </a:xfrm>
           <a:prstGeom prst="rect">
             <a:avLst/>
@@ -4989,14 +4838,14 @@
       </p:sp>
       <p:sp>
         <p:nvSpPr>
-          <p:cNvPr id="25" name="TextBox 24"/>
+          <p:cNvPr id="21" name="TextBox 20"/>
           <p:cNvSpPr txBox="1"/>
           <p:nvPr/>
         </p:nvSpPr>
         <p:spPr>
           <a:xfrm>
-            <a:off x="502920" y="3970002"/>
-            <a:ext cx="1307592" cy="639889"/>
+            <a:off x="502920" y="3553174"/>
+            <a:ext cx="1307592" cy="402240"/>
           </a:xfrm>
           <a:prstGeom prst="rect">
             <a:avLst/>
@@ -5021,21 +4870,21 @@
                 </a:solidFill>
                 <a:latin typeface="Arial"/>
               </a:rPr>
-              <a:t>Россия, все классы</a:t>
-            </a:r>
-          </a:p>
-        </p:txBody>
-      </p:sp>
-      <p:sp>
-        <p:nvSpPr>
-          <p:cNvPr id="26" name="Rounded Rectangle 25"/>
+              <a:t>США, полный</a:t>
+            </a:r>
+          </a:p>
+        </p:txBody>
+      </p:sp>
+      <p:sp>
+        <p:nvSpPr>
+          <p:cNvPr id="22" name="Rounded Rectangle 21"/>
           <p:cNvSpPr/>
           <p:nvPr/>
         </p:nvSpPr>
         <p:spPr>
           <a:xfrm>
-            <a:off x="1920240" y="3933426"/>
-            <a:ext cx="2236393" cy="713041"/>
+            <a:off x="1920240" y="3516598"/>
+            <a:ext cx="2236393" cy="475392"/>
           </a:xfrm>
           <a:prstGeom prst="roundRect">
             <a:avLst>
@@ -5062,14 +4911,14 @@
       </p:sp>
       <p:sp>
         <p:nvSpPr>
-          <p:cNvPr id="27" name="TextBox 26"/>
+          <p:cNvPr id="23" name="TextBox 22"/>
           <p:cNvSpPr txBox="1"/>
           <p:nvPr/>
         </p:nvSpPr>
         <p:spPr>
           <a:xfrm>
-            <a:off x="2002536" y="3979146"/>
-            <a:ext cx="2071801" cy="621601"/>
+            <a:off x="2002536" y="3562318"/>
+            <a:ext cx="2071801" cy="383952"/>
           </a:xfrm>
           <a:prstGeom prst="rect">
             <a:avLst/>
@@ -5094,20 +4943,20 @@
                 </a:solidFill>
                 <a:latin typeface="Arial"/>
               </a:rPr>
-              <a:t>Технические испытания</a:t>
-            </a:r>
-          </a:p>
-        </p:txBody>
-      </p:sp>
-      <p:sp>
-        <p:nvSpPr>
-          <p:cNvPr id="28" name="Right Arrow 27"/>
+              <a:t>Заявка</a:t>
+            </a:r>
+          </a:p>
+        </p:txBody>
+      </p:sp>
+      <p:sp>
+        <p:nvSpPr>
+          <p:cNvPr id="24" name="Right Arrow 23"/>
           <p:cNvSpPr/>
           <p:nvPr/>
         </p:nvSpPr>
         <p:spPr>
           <a:xfrm>
-            <a:off x="4202353" y="4221367"/>
+            <a:off x="4202353" y="3685714"/>
             <a:ext cx="182880" cy="137160"/>
           </a:xfrm>
           <a:prstGeom prst="rightArrow">
@@ -5131,14 +4980,14 @@
       </p:sp>
       <p:sp>
         <p:nvSpPr>
-          <p:cNvPr id="29" name="Rounded Rectangle 28"/>
+          <p:cNvPr id="25" name="Rounded Rectangle 24"/>
           <p:cNvSpPr/>
           <p:nvPr/>
         </p:nvSpPr>
         <p:spPr>
           <a:xfrm>
-            <a:off x="4430953" y="3933426"/>
-            <a:ext cx="2236393" cy="713041"/>
+            <a:off x="4430953" y="3516598"/>
+            <a:ext cx="2236393" cy="475392"/>
           </a:xfrm>
           <a:prstGeom prst="roundRect">
             <a:avLst>
@@ -5165,14 +5014,14 @@
       </p:sp>
       <p:sp>
         <p:nvSpPr>
-          <p:cNvPr id="30" name="TextBox 29"/>
+          <p:cNvPr id="26" name="TextBox 25"/>
           <p:cNvSpPr txBox="1"/>
           <p:nvPr/>
         </p:nvSpPr>
         <p:spPr>
           <a:xfrm>
-            <a:off x="4513249" y="3979146"/>
-            <a:ext cx="2071801" cy="621601"/>
+            <a:off x="4513249" y="3562318"/>
+            <a:ext cx="2071801" cy="383952"/>
           </a:xfrm>
           <a:prstGeom prst="rect">
             <a:avLst/>
@@ -5197,20 +5046,20 @@
                 </a:solidFill>
                 <a:latin typeface="Arial"/>
               </a:rPr>
-              <a:t>Токсикология</a:t>
-            </a:r>
-          </a:p>
-        </p:txBody>
-      </p:sp>
-      <p:sp>
-        <p:nvSpPr>
-          <p:cNvPr id="31" name="Right Arrow 30"/>
+              <a:t>Испытания</a:t>
+            </a:r>
+          </a:p>
+        </p:txBody>
+      </p:sp>
+      <p:sp>
+        <p:nvSpPr>
+          <p:cNvPr id="27" name="Right Arrow 26"/>
           <p:cNvSpPr/>
           <p:nvPr/>
         </p:nvSpPr>
         <p:spPr>
           <a:xfrm>
-            <a:off x="6713067" y="4221367"/>
+            <a:off x="6713067" y="3685714"/>
             <a:ext cx="182880" cy="137160"/>
           </a:xfrm>
           <a:prstGeom prst="rightArrow">
@@ -5234,14 +5083,14 @@
       </p:sp>
       <p:sp>
         <p:nvSpPr>
-          <p:cNvPr id="32" name="Rounded Rectangle 31"/>
+          <p:cNvPr id="28" name="Rounded Rectangle 27"/>
           <p:cNvSpPr/>
           <p:nvPr/>
         </p:nvSpPr>
         <p:spPr>
           <a:xfrm>
-            <a:off x="6941667" y="3933426"/>
-            <a:ext cx="2236393" cy="713041"/>
+            <a:off x="6941667" y="3516598"/>
+            <a:ext cx="2236393" cy="475392"/>
           </a:xfrm>
           <a:prstGeom prst="roundRect">
             <a:avLst>
@@ -5268,14 +5117,14 @@
       </p:sp>
       <p:sp>
         <p:nvSpPr>
-          <p:cNvPr id="33" name="TextBox 32"/>
+          <p:cNvPr id="29" name="TextBox 28"/>
           <p:cNvSpPr txBox="1"/>
           <p:nvPr/>
         </p:nvSpPr>
         <p:spPr>
           <a:xfrm>
-            <a:off x="7023963" y="3979146"/>
-            <a:ext cx="2071801" cy="621601"/>
+            <a:off x="7023963" y="3562318"/>
+            <a:ext cx="2071801" cy="383952"/>
           </a:xfrm>
           <a:prstGeom prst="rect">
             <a:avLst/>
@@ -5300,20 +5149,20 @@
                 </a:solidFill>
                 <a:latin typeface="Arial"/>
               </a:rPr>
-              <a:t>Клинические данные</a:t>
-            </a:r>
-          </a:p>
-        </p:txBody>
-      </p:sp>
-      <p:sp>
-        <p:nvSpPr>
-          <p:cNvPr id="34" name="Right Arrow 33"/>
+              <a:t>Экспертиза</a:t>
+            </a:r>
+          </a:p>
+        </p:txBody>
+      </p:sp>
+      <p:sp>
+        <p:nvSpPr>
+          <p:cNvPr id="30" name="Right Arrow 29"/>
           <p:cNvSpPr/>
           <p:nvPr/>
         </p:nvSpPr>
         <p:spPr>
           <a:xfrm>
-            <a:off x="9223781" y="4221367"/>
+            <a:off x="9223781" y="3685714"/>
             <a:ext cx="182880" cy="137160"/>
           </a:xfrm>
           <a:prstGeom prst="rightArrow">
@@ -5337,14 +5186,14 @@
       </p:sp>
       <p:sp>
         <p:nvSpPr>
-          <p:cNvPr id="35" name="Rounded Rectangle 34"/>
+          <p:cNvPr id="31" name="Rounded Rectangle 30"/>
           <p:cNvSpPr/>
           <p:nvPr/>
         </p:nvSpPr>
         <p:spPr>
           <a:xfrm>
-            <a:off x="9452381" y="3933426"/>
-            <a:ext cx="2236393" cy="713041"/>
+            <a:off x="9452381" y="3516598"/>
+            <a:ext cx="2236393" cy="475392"/>
           </a:xfrm>
           <a:prstGeom prst="roundRect">
             <a:avLst>
@@ -5371,14 +5220,14 @@
       </p:sp>
       <p:sp>
         <p:nvSpPr>
-          <p:cNvPr id="36" name="TextBox 35"/>
+          <p:cNvPr id="32" name="TextBox 31"/>
           <p:cNvSpPr txBox="1"/>
           <p:nvPr/>
         </p:nvSpPr>
         <p:spPr>
           <a:xfrm>
-            <a:off x="9534677" y="3979146"/>
-            <a:ext cx="2071801" cy="621601"/>
+            <a:off x="9534677" y="3562318"/>
+            <a:ext cx="2071801" cy="383952"/>
           </a:xfrm>
           <a:prstGeom prst="rect">
             <a:avLst/>
@@ -5403,20 +5252,441 @@
                 </a:solidFill>
                 <a:latin typeface="Arial"/>
               </a:rPr>
-              <a:t>Государственная экспертиза</a:t>
-            </a:r>
-          </a:p>
-        </p:txBody>
-      </p:sp>
-      <p:sp>
-        <p:nvSpPr>
-          <p:cNvPr id="37" name="TextBox 36"/>
+              <a:t>Допуск</a:t>
+            </a:r>
+          </a:p>
+        </p:txBody>
+      </p:sp>
+      <p:sp>
+        <p:nvSpPr>
+          <p:cNvPr id="33" name="TextBox 32"/>
           <p:cNvSpPr txBox="1"/>
           <p:nvPr/>
         </p:nvSpPr>
         <p:spPr>
           <a:xfrm>
-            <a:off x="502920" y="4683044"/>
+            <a:off x="502920" y="4174871"/>
+            <a:ext cx="1307592" cy="402240"/>
+          </a:xfrm>
+          <a:prstGeom prst="rect">
+            <a:avLst/>
+          </a:prstGeom>
+          <a:noFill/>
+        </p:spPr>
+        <p:txBody>
+          <a:bodyPr wrap="square" lIns="0" rIns="0" tIns="0" bIns="0" anchor="ctr">
+            <a:spAutoFit/>
+          </a:bodyPr>
+          <a:lstStyle/>
+          <a:p>
+            <a:pPr algn="l">
+              <a:lnSpc>
+                <a:spcPct val="110000"/>
+              </a:lnSpc>
+            </a:pPr>
+            <a:r>
+              <a:rPr sz="1200" b="1" i="0">
+                <a:solidFill>
+                  <a:srgbClr val="065A82"/>
+                </a:solidFill>
+                <a:latin typeface="Arial"/>
+              </a:rPr>
+              <a:t>Россия, все классы</a:t>
+            </a:r>
+          </a:p>
+        </p:txBody>
+      </p:sp>
+      <p:sp>
+        <p:nvSpPr>
+          <p:cNvPr id="34" name="Rounded Rectangle 33"/>
+          <p:cNvSpPr/>
+          <p:nvPr/>
+        </p:nvSpPr>
+        <p:spPr>
+          <a:xfrm>
+            <a:off x="1920240" y="4138295"/>
+            <a:ext cx="2236393" cy="475392"/>
+          </a:xfrm>
+          <a:prstGeom prst="roundRect">
+            <a:avLst>
+              <a:gd name="adj" fmla="val 25000"/>
+            </a:avLst>
+          </a:prstGeom>
+          <a:solidFill>
+            <a:srgbClr val="F4F7FA"/>
+          </a:solidFill>
+          <a:ln w="16510">
+            <a:solidFill>
+              <a:srgbClr val="1C7293"/>
+            </a:solidFill>
+          </a:ln>
+          <a:effectLst/>
+        </p:spPr>
+        <p:txBody>
+          <a:bodyPr rtlCol="0" anchor="ctr"/>
+          <a:lstStyle/>
+          <a:p>
+            <a:pPr algn="ctr"/>
+          </a:p>
+        </p:txBody>
+      </p:sp>
+      <p:sp>
+        <p:nvSpPr>
+          <p:cNvPr id="35" name="TextBox 34"/>
+          <p:cNvSpPr txBox="1"/>
+          <p:nvPr/>
+        </p:nvSpPr>
+        <p:spPr>
+          <a:xfrm>
+            <a:off x="2002536" y="4184015"/>
+            <a:ext cx="2071801" cy="383952"/>
+          </a:xfrm>
+          <a:prstGeom prst="rect">
+            <a:avLst/>
+          </a:prstGeom>
+          <a:noFill/>
+        </p:spPr>
+        <p:txBody>
+          <a:bodyPr wrap="square" lIns="0" rIns="0" tIns="0" bIns="0" anchor="ctr">
+            <a:spAutoFit/>
+          </a:bodyPr>
+          <a:lstStyle/>
+          <a:p>
+            <a:pPr algn="ctr">
+              <a:lnSpc>
+                <a:spcPct val="112000"/>
+              </a:lnSpc>
+            </a:pPr>
+            <a:r>
+              <a:rPr sz="1350" b="0" i="0">
+                <a:solidFill>
+                  <a:srgbClr val="21295C"/>
+                </a:solidFill>
+                <a:latin typeface="Arial"/>
+              </a:rPr>
+              <a:t>Испытания</a:t>
+            </a:r>
+          </a:p>
+        </p:txBody>
+      </p:sp>
+      <p:sp>
+        <p:nvSpPr>
+          <p:cNvPr id="36" name="Right Arrow 35"/>
+          <p:cNvSpPr/>
+          <p:nvPr/>
+        </p:nvSpPr>
+        <p:spPr>
+          <a:xfrm>
+            <a:off x="4202353" y="4307411"/>
+            <a:ext cx="182880" cy="137160"/>
+          </a:xfrm>
+          <a:prstGeom prst="rightArrow">
+            <a:avLst/>
+          </a:prstGeom>
+          <a:solidFill>
+            <a:srgbClr val="1C7293"/>
+          </a:solidFill>
+          <a:ln>
+            <a:noFill/>
+          </a:ln>
+          <a:effectLst/>
+        </p:spPr>
+        <p:txBody>
+          <a:bodyPr rtlCol="0" anchor="ctr"/>
+          <a:lstStyle/>
+          <a:p>
+            <a:pPr algn="ctr"/>
+          </a:p>
+        </p:txBody>
+      </p:sp>
+      <p:sp>
+        <p:nvSpPr>
+          <p:cNvPr id="37" name="Rounded Rectangle 36"/>
+          <p:cNvSpPr/>
+          <p:nvPr/>
+        </p:nvSpPr>
+        <p:spPr>
+          <a:xfrm>
+            <a:off x="4430953" y="4138295"/>
+            <a:ext cx="2236393" cy="475392"/>
+          </a:xfrm>
+          <a:prstGeom prst="roundRect">
+            <a:avLst>
+              <a:gd name="adj" fmla="val 25000"/>
+            </a:avLst>
+          </a:prstGeom>
+          <a:solidFill>
+            <a:srgbClr val="F4F7FA"/>
+          </a:solidFill>
+          <a:ln w="16510">
+            <a:solidFill>
+              <a:srgbClr val="1C7293"/>
+            </a:solidFill>
+          </a:ln>
+          <a:effectLst/>
+        </p:spPr>
+        <p:txBody>
+          <a:bodyPr rtlCol="0" anchor="ctr"/>
+          <a:lstStyle/>
+          <a:p>
+            <a:pPr algn="ctr"/>
+          </a:p>
+        </p:txBody>
+      </p:sp>
+      <p:sp>
+        <p:nvSpPr>
+          <p:cNvPr id="38" name="TextBox 37"/>
+          <p:cNvSpPr txBox="1"/>
+          <p:nvPr/>
+        </p:nvSpPr>
+        <p:spPr>
+          <a:xfrm>
+            <a:off x="4513249" y="4184015"/>
+            <a:ext cx="2071801" cy="383952"/>
+          </a:xfrm>
+          <a:prstGeom prst="rect">
+            <a:avLst/>
+          </a:prstGeom>
+          <a:noFill/>
+        </p:spPr>
+        <p:txBody>
+          <a:bodyPr wrap="square" lIns="0" rIns="0" tIns="0" bIns="0" anchor="ctr">
+            <a:spAutoFit/>
+          </a:bodyPr>
+          <a:lstStyle/>
+          <a:p>
+            <a:pPr algn="ctr">
+              <a:lnSpc>
+                <a:spcPct val="112000"/>
+              </a:lnSpc>
+            </a:pPr>
+            <a:r>
+              <a:rPr sz="1350" b="0" i="0">
+                <a:solidFill>
+                  <a:srgbClr val="21295C"/>
+                </a:solidFill>
+                <a:latin typeface="Arial"/>
+              </a:rPr>
+              <a:t>Токсикология</a:t>
+            </a:r>
+          </a:p>
+        </p:txBody>
+      </p:sp>
+      <p:sp>
+        <p:nvSpPr>
+          <p:cNvPr id="39" name="Right Arrow 38"/>
+          <p:cNvSpPr/>
+          <p:nvPr/>
+        </p:nvSpPr>
+        <p:spPr>
+          <a:xfrm>
+            <a:off x="6713067" y="4307411"/>
+            <a:ext cx="182880" cy="137160"/>
+          </a:xfrm>
+          <a:prstGeom prst="rightArrow">
+            <a:avLst/>
+          </a:prstGeom>
+          <a:solidFill>
+            <a:srgbClr val="1C7293"/>
+          </a:solidFill>
+          <a:ln>
+            <a:noFill/>
+          </a:ln>
+          <a:effectLst/>
+        </p:spPr>
+        <p:txBody>
+          <a:bodyPr rtlCol="0" anchor="ctr"/>
+          <a:lstStyle/>
+          <a:p>
+            <a:pPr algn="ctr"/>
+          </a:p>
+        </p:txBody>
+      </p:sp>
+      <p:sp>
+        <p:nvSpPr>
+          <p:cNvPr id="40" name="Rounded Rectangle 39"/>
+          <p:cNvSpPr/>
+          <p:nvPr/>
+        </p:nvSpPr>
+        <p:spPr>
+          <a:xfrm>
+            <a:off x="6941667" y="4138295"/>
+            <a:ext cx="2236393" cy="475392"/>
+          </a:xfrm>
+          <a:prstGeom prst="roundRect">
+            <a:avLst>
+              <a:gd name="adj" fmla="val 25000"/>
+            </a:avLst>
+          </a:prstGeom>
+          <a:solidFill>
+            <a:srgbClr val="F4F7FA"/>
+          </a:solidFill>
+          <a:ln w="16510">
+            <a:solidFill>
+              <a:srgbClr val="1C7293"/>
+            </a:solidFill>
+          </a:ln>
+          <a:effectLst/>
+        </p:spPr>
+        <p:txBody>
+          <a:bodyPr rtlCol="0" anchor="ctr"/>
+          <a:lstStyle/>
+          <a:p>
+            <a:pPr algn="ctr"/>
+          </a:p>
+        </p:txBody>
+      </p:sp>
+      <p:sp>
+        <p:nvSpPr>
+          <p:cNvPr id="41" name="TextBox 40"/>
+          <p:cNvSpPr txBox="1"/>
+          <p:nvPr/>
+        </p:nvSpPr>
+        <p:spPr>
+          <a:xfrm>
+            <a:off x="7023963" y="4184015"/>
+            <a:ext cx="2071801" cy="383952"/>
+          </a:xfrm>
+          <a:prstGeom prst="rect">
+            <a:avLst/>
+          </a:prstGeom>
+          <a:noFill/>
+        </p:spPr>
+        <p:txBody>
+          <a:bodyPr wrap="square" lIns="0" rIns="0" tIns="0" bIns="0" anchor="ctr">
+            <a:spAutoFit/>
+          </a:bodyPr>
+          <a:lstStyle/>
+          <a:p>
+            <a:pPr algn="ctr">
+              <a:lnSpc>
+                <a:spcPct val="112000"/>
+              </a:lnSpc>
+            </a:pPr>
+            <a:r>
+              <a:rPr sz="1350" b="0" i="0">
+                <a:solidFill>
+                  <a:srgbClr val="21295C"/>
+                </a:solidFill>
+                <a:latin typeface="Arial"/>
+              </a:rPr>
+              <a:t>Клинические данные</a:t>
+            </a:r>
+          </a:p>
+        </p:txBody>
+      </p:sp>
+      <p:sp>
+        <p:nvSpPr>
+          <p:cNvPr id="42" name="Right Arrow 41"/>
+          <p:cNvSpPr/>
+          <p:nvPr/>
+        </p:nvSpPr>
+        <p:spPr>
+          <a:xfrm>
+            <a:off x="9223781" y="4307411"/>
+            <a:ext cx="182880" cy="137160"/>
+          </a:xfrm>
+          <a:prstGeom prst="rightArrow">
+            <a:avLst/>
+          </a:prstGeom>
+          <a:solidFill>
+            <a:srgbClr val="1C7293"/>
+          </a:solidFill>
+          <a:ln>
+            <a:noFill/>
+          </a:ln>
+          <a:effectLst/>
+        </p:spPr>
+        <p:txBody>
+          <a:bodyPr rtlCol="0" anchor="ctr"/>
+          <a:lstStyle/>
+          <a:p>
+            <a:pPr algn="ctr"/>
+          </a:p>
+        </p:txBody>
+      </p:sp>
+      <p:sp>
+        <p:nvSpPr>
+          <p:cNvPr id="43" name="Rounded Rectangle 42"/>
+          <p:cNvSpPr/>
+          <p:nvPr/>
+        </p:nvSpPr>
+        <p:spPr>
+          <a:xfrm>
+            <a:off x="9452381" y="4138295"/>
+            <a:ext cx="2236393" cy="475392"/>
+          </a:xfrm>
+          <a:prstGeom prst="roundRect">
+            <a:avLst>
+              <a:gd name="adj" fmla="val 25000"/>
+            </a:avLst>
+          </a:prstGeom>
+          <a:solidFill>
+            <a:srgbClr val="F4F7FA"/>
+          </a:solidFill>
+          <a:ln w="16510">
+            <a:solidFill>
+              <a:srgbClr val="1C7293"/>
+            </a:solidFill>
+          </a:ln>
+          <a:effectLst/>
+        </p:spPr>
+        <p:txBody>
+          <a:bodyPr rtlCol="0" anchor="ctr"/>
+          <a:lstStyle/>
+          <a:p>
+            <a:pPr algn="ctr"/>
+          </a:p>
+        </p:txBody>
+      </p:sp>
+      <p:sp>
+        <p:nvSpPr>
+          <p:cNvPr id="44" name="TextBox 43"/>
+          <p:cNvSpPr txBox="1"/>
+          <p:nvPr/>
+        </p:nvSpPr>
+        <p:spPr>
+          <a:xfrm>
+            <a:off x="9534677" y="4184015"/>
+            <a:ext cx="2071801" cy="383952"/>
+          </a:xfrm>
+          <a:prstGeom prst="rect">
+            <a:avLst/>
+          </a:prstGeom>
+          <a:noFill/>
+        </p:spPr>
+        <p:txBody>
+          <a:bodyPr wrap="square" lIns="0" rIns="0" tIns="0" bIns="0" anchor="ctr">
+            <a:spAutoFit/>
+          </a:bodyPr>
+          <a:lstStyle/>
+          <a:p>
+            <a:pPr algn="ctr">
+              <a:lnSpc>
+                <a:spcPct val="112000"/>
+              </a:lnSpc>
+            </a:pPr>
+            <a:r>
+              <a:rPr sz="1350" b="0" i="0">
+                <a:solidFill>
+                  <a:srgbClr val="21295C"/>
+                </a:solidFill>
+                <a:latin typeface="Arial"/>
+              </a:rPr>
+              <a:t>Экспертиза</a:t>
+            </a:r>
+          </a:p>
+        </p:txBody>
+      </p:sp>
+      <p:sp>
+        <p:nvSpPr>
+          <p:cNvPr id="45" name="TextBox 44"/>
+          <p:cNvSpPr txBox="1"/>
+          <p:nvPr/>
+        </p:nvSpPr>
+        <p:spPr>
+          <a:xfrm>
+            <a:off x="502920" y="4650264"/>
             <a:ext cx="11185855" cy="211243"/>
           </a:xfrm>
           <a:prstGeom prst="rect">
@@ -5442,25 +5712,25 @@
                 </a:solidFill>
                 <a:latin typeface="Arial"/>
               </a:rPr>
-              <a:t>Короткий путь минует и испытания, и оценку по существу</a:t>
-            </a:r>
-          </a:p>
-        </p:txBody>
-      </p:sp>
-      <p:sp>
-        <p:nvSpPr>
-          <p:cNvPr id="38" name="Rounded Rectangle 37"/>
+              <a:t>Полный американский порядок близок к российскому; короткого пути в России нет</a:t>
+            </a:r>
+          </a:p>
+        </p:txBody>
+      </p:sp>
+      <p:sp>
+        <p:nvSpPr>
+          <p:cNvPr id="46" name="Rounded Rectangle 45"/>
           <p:cNvSpPr/>
           <p:nvPr/>
         </p:nvSpPr>
         <p:spPr>
           <a:xfrm>
-            <a:off x="374904" y="4985728"/>
-            <a:ext cx="11441887" cy="1250479"/>
+            <a:off x="374904" y="4952947"/>
+            <a:ext cx="11441887" cy="1165285"/>
           </a:xfrm>
           <a:prstGeom prst="roundRect">
             <a:avLst>
-              <a:gd name="adj" fmla="val 24374"/>
+              <a:gd name="adj" fmla="val 25000"/>
             </a:avLst>
           </a:prstGeom>
           <a:solidFill>
@@ -5483,14 +5753,14 @@
       </p:sp>
       <p:sp>
         <p:nvSpPr>
-          <p:cNvPr id="39" name="TextBox 38"/>
+          <p:cNvPr id="47" name="TextBox 46"/>
           <p:cNvSpPr txBox="1"/>
           <p:nvPr/>
         </p:nvSpPr>
         <p:spPr>
           <a:xfrm>
-            <a:off x="539496" y="5077168"/>
-            <a:ext cx="11112703" cy="1159039"/>
+            <a:off x="539496" y="5044387"/>
+            <a:ext cx="11112703" cy="1191820"/>
           </a:xfrm>
           <a:prstGeom prst="rect">
             <a:avLst/>
@@ -5515,7 +5785,7 @@
                 </a:solidFill>
                 <a:latin typeface="Arial"/>
               </a:rPr>
-              <a:t>Класс риска назначает порядок:</a:t>
+              <a:t>Без регистрационного удостоверения изделие нельзя ни применить на человеке, ни купить за бюджетные деньги.</a:t>
             </a:r>
             <a:r>
               <a:rPr sz="1350" b="0" i="0">
@@ -5524,7 +5794,7 @@
                 </a:solidFill>
                 <a:latin typeface="Arial"/>
               </a:rPr>
-              <a:t> в США классов три, в России четыре — 1 · 2а · 2б · 3.</a:t>
+              <a:t> Допуск — ворота и в клинику, и в закупку.</a:t>
             </a:r>
           </a:p>
           <a:p>
@@ -5552,7 +5822,7 @@
                 </a:solidFill>
                 <a:latin typeface="Arial"/>
               </a:rPr>
-              <a:t>Короткий путь США — заявление о похожести на уже допущенное изделие:</a:t>
+              <a:t>Короткий путь — заявление о похожести на уже допущенное изделие:</a:t>
             </a:r>
             <a:r>
               <a:rPr sz="1350" b="0" i="0">
@@ -5561,14 +5831,14 @@
                 </a:solidFill>
                 <a:latin typeface="Arial"/>
               </a:rPr>
-              <a:t> своих клинических данных не требует, оценки по существу не включает. Полный цикл с испытаниями и экспертизой в США тоже есть. В России испытания с участием человека обязательны по новизне изделия или метода, экспертиза идёт при любом классе.</a:t>
-            </a:r>
-          </a:p>
-        </p:txBody>
-      </p:sp>
-      <p:sp>
-        <p:nvSpPr>
-          <p:cNvPr id="40" name="Rectangle 39"/>
+              <a:t> им идут 97,5 новых решений из ста, полным циклом — 1,04.</a:t>
+            </a:r>
+          </a:p>
+        </p:txBody>
+      </p:sp>
+      <p:sp>
+        <p:nvSpPr>
+          <p:cNvPr id="48" name="Rectangle 47"/>
           <p:cNvSpPr/>
           <p:nvPr/>
         </p:nvSpPr>
@@ -5598,7 +5868,7 @@
       </p:sp>
       <p:sp>
         <p:nvSpPr>
-          <p:cNvPr id="41" name="TextBox 40"/>
+          <p:cNvPr id="49" name="TextBox 48"/>
           <p:cNvSpPr txBox="1"/>
           <p:nvPr/>
         </p:nvSpPr>
@@ -5768,13 +6038,13 @@
               </a:lnSpc>
             </a:pPr>
             <a:r>
-              <a:rPr sz="2500" b="1" i="0">
+              <a:rPr sz="2700" b="1" i="0">
                 <a:solidFill>
                   <a:srgbClr val="21295C"/>
                 </a:solidFill>
                 <a:latin typeface="Arial"/>
               </a:rPr>
-              <a:t>Изделия с ИИ: сколько допущено, какими путями, в каких странах</a:t>
+              <a:t>Изделия с ИИ: счёт и пути</a:t>
             </a:r>
           </a:p>
         </p:txBody>
@@ -5787,12 +6057,70 @@
         </p:nvSpPr>
         <p:spPr>
           <a:xfrm>
-            <a:off x="502920" y="1335024"/>
-            <a:ext cx="3618890" cy="1584468"/>
+            <a:off x="507847" y="1335024"/>
+            <a:ext cx="11176000" cy="2743200"/>
           </a:xfrm>
           <a:prstGeom prst="roundRect">
             <a:avLst>
-              <a:gd name="adj" fmla="val 19236"/>
+              <a:gd name="adj" fmla="val 11111"/>
+            </a:avLst>
+          </a:prstGeom>
+          <a:solidFill>
+            <a:srgbClr val="F4F7FA"/>
+          </a:solidFill>
+          <a:ln w="19050">
+            <a:solidFill>
+              <a:srgbClr val="1C7293"/>
+            </a:solidFill>
+          </a:ln>
+          <a:effectLst/>
+        </p:spPr>
+        <p:txBody>
+          <a:bodyPr rtlCol="0" anchor="ctr"/>
+          <a:lstStyle/>
+          <a:p>
+            <a:pPr algn="ctr"/>
+          </a:p>
+        </p:txBody>
+      </p:sp>
+      <p:pic>
+        <p:nvPicPr>
+          <p:cNvPr id="5" name="Picture 4" descr="s0Xb-strany-i-dinamika.png"/>
+          <p:cNvPicPr>
+            <a:picLocks noChangeAspect="1"/>
+          </p:cNvPicPr>
+          <p:nvPr/>
+        </p:nvPicPr>
+        <p:blipFill>
+          <a:blip r:embed="rId2"/>
+          <a:stretch>
+            <a:fillRect/>
+          </a:stretch>
+        </p:blipFill>
+        <p:spPr>
+          <a:xfrm>
+            <a:off x="1066647" y="1472184"/>
+            <a:ext cx="10058400" cy="2468880"/>
+          </a:xfrm>
+          <a:prstGeom prst="rect">
+            <a:avLst/>
+          </a:prstGeom>
+        </p:spPr>
+      </p:pic>
+      <p:sp>
+        <p:nvSpPr>
+          <p:cNvPr id="6" name="Rounded Rectangle 5"/>
+          <p:cNvSpPr/>
+          <p:nvPr/>
+        </p:nvSpPr>
+        <p:spPr>
+          <a:xfrm>
+            <a:off x="502920" y="4261104"/>
+            <a:ext cx="3618890" cy="1165753"/>
+          </a:xfrm>
+          <a:prstGeom prst="roundRect">
+            <a:avLst>
+              <a:gd name="adj" fmla="val 25000"/>
             </a:avLst>
           </a:prstGeom>
           <a:solidFill>
@@ -5815,14 +6143,14 @@
       </p:sp>
       <p:sp>
         <p:nvSpPr>
-          <p:cNvPr id="5" name="TextBox 4"/>
+          <p:cNvPr id="7" name="TextBox 6"/>
           <p:cNvSpPr txBox="1"/>
           <p:nvPr/>
         </p:nvSpPr>
         <p:spPr>
           <a:xfrm>
-            <a:off x="640080" y="1472184"/>
-            <a:ext cx="3344570" cy="460662"/>
+            <a:off x="640080" y="4398264"/>
+            <a:ext cx="3344570" cy="253191"/>
           </a:xfrm>
           <a:prstGeom prst="rect">
             <a:avLst/>
@@ -5847,20 +6175,20 @@
                 </a:solidFill>
                 <a:latin typeface="Arial"/>
               </a:rPr>
-              <a:t>ИЗДЕЛИЯ С ИИ БЕЗ ССЫЛКИ НА ПРЕДШЕСТВЕННИК, США</a:t>
-            </a:r>
-          </a:p>
-        </p:txBody>
-      </p:sp>
-      <p:sp>
-        <p:nvSpPr>
-          <p:cNvPr id="6" name="TextBox 5"/>
+              <a:t>КОРОТКОЙ ДОРОГОЙ</a:t>
+            </a:r>
+          </a:p>
+        </p:txBody>
+      </p:sp>
+      <p:sp>
+        <p:nvSpPr>
+          <p:cNvPr id="8" name="TextBox 7"/>
           <p:cNvSpPr txBox="1"/>
           <p:nvPr/>
         </p:nvSpPr>
         <p:spPr>
           <a:xfrm>
-            <a:off x="640080" y="1932846"/>
+            <a:off x="640080" y="4651455"/>
             <a:ext cx="3344570" cy="426999"/>
           </a:xfrm>
           <a:prstGeom prst="rect">
@@ -5886,21 +6214,21 @@
                 </a:solidFill>
                 <a:latin typeface="Arial"/>
               </a:rPr>
-              <a:t>7 → 56</a:t>
-            </a:r>
-          </a:p>
-        </p:txBody>
-      </p:sp>
-      <p:sp>
-        <p:nvSpPr>
-          <p:cNvPr id="7" name="TextBox 6"/>
+              <a:t>1 553 из 1 614</a:t>
+            </a:r>
+          </a:p>
+        </p:txBody>
+      </p:sp>
+      <p:sp>
+        <p:nvSpPr>
+          <p:cNvPr id="9" name="TextBox 8"/>
           <p:cNvSpPr txBox="1"/>
           <p:nvPr/>
         </p:nvSpPr>
         <p:spPr>
           <a:xfrm>
-            <a:off x="640080" y="2359845"/>
-            <a:ext cx="3344570" cy="422486"/>
+            <a:off x="640080" y="5078454"/>
+            <a:ext cx="3344570" cy="211243"/>
           </a:xfrm>
           <a:prstGeom prst="rect">
             <a:avLst/>
@@ -5925,25 +6253,25 @@
                 </a:solidFill>
                 <a:latin typeface="Arial"/>
               </a:rPr>
-              <a:t>накопленным счётом, 2010 и 2025: плюс 49, по 3,1 в год</a:t>
-            </a:r>
-          </a:p>
-        </p:txBody>
-      </p:sp>
-      <p:sp>
-        <p:nvSpPr>
-          <p:cNvPr id="8" name="Rounded Rectangle 7"/>
+              <a:t>по похожести на предшественник</a:t>
+            </a:r>
+          </a:p>
+        </p:txBody>
+      </p:sp>
+      <p:sp>
+        <p:nvSpPr>
+          <p:cNvPr id="10" name="Rounded Rectangle 9"/>
           <p:cNvSpPr/>
           <p:nvPr/>
         </p:nvSpPr>
         <p:spPr>
           <a:xfrm>
-            <a:off x="4286402" y="1335024"/>
-            <a:ext cx="3618890" cy="1584468"/>
+            <a:off x="4286402" y="4261104"/>
+            <a:ext cx="3618890" cy="1165753"/>
           </a:xfrm>
           <a:prstGeom prst="roundRect">
             <a:avLst>
-              <a:gd name="adj" fmla="val 19236"/>
+              <a:gd name="adj" fmla="val 25000"/>
             </a:avLst>
           </a:prstGeom>
           <a:solidFill>
@@ -5966,13 +6294,13 @@
       </p:sp>
       <p:sp>
         <p:nvSpPr>
-          <p:cNvPr id="9" name="TextBox 8"/>
+          <p:cNvPr id="11" name="TextBox 10"/>
           <p:cNvSpPr txBox="1"/>
           <p:nvPr/>
         </p:nvSpPr>
         <p:spPr>
           <a:xfrm>
-            <a:off x="4423562" y="1472184"/>
+            <a:off x="4423562" y="4398264"/>
             <a:ext cx="3344570" cy="253191"/>
           </a:xfrm>
           <a:prstGeom prst="rect">
@@ -5998,20 +6326,20 @@
                 </a:solidFill>
                 <a:latin typeface="Arial"/>
               </a:rPr>
-              <a:t>КАКИМ ПУТЁМ, ИЗ 1 614 ИЗДЕЛИЙ С ИИ</a:t>
-            </a:r>
-          </a:p>
-        </p:txBody>
-      </p:sp>
-      <p:sp>
-        <p:nvSpPr>
-          <p:cNvPr id="10" name="TextBox 9"/>
+              <a:t>ПОЛНЫМ ЦИКЛОМ</a:t>
+            </a:r>
+          </a:p>
+        </p:txBody>
+      </p:sp>
+      <p:sp>
+        <p:nvSpPr>
+          <p:cNvPr id="12" name="TextBox 11"/>
           <p:cNvSpPr txBox="1"/>
           <p:nvPr/>
         </p:nvSpPr>
         <p:spPr>
           <a:xfrm>
-            <a:off x="4423562" y="1725375"/>
+            <a:off x="4423562" y="4651455"/>
             <a:ext cx="3344570" cy="426999"/>
           </a:xfrm>
           <a:prstGeom prst="rect">
@@ -6037,21 +6365,21 @@
                 </a:solidFill>
                 <a:latin typeface="Arial"/>
               </a:rPr>
-              <a:t>1 553 · 40 · 21</a:t>
-            </a:r>
-          </a:p>
-        </p:txBody>
-      </p:sp>
-      <p:sp>
-        <p:nvSpPr>
-          <p:cNvPr id="11" name="TextBox 10"/>
+              <a:t>21 из 1 614</a:t>
+            </a:r>
+          </a:p>
+        </p:txBody>
+      </p:sp>
+      <p:sp>
+        <p:nvSpPr>
+          <p:cNvPr id="13" name="TextBox 12"/>
           <p:cNvSpPr txBox="1"/>
           <p:nvPr/>
         </p:nvSpPr>
         <p:spPr>
           <a:xfrm>
-            <a:off x="4423562" y="2152374"/>
-            <a:ext cx="3344570" cy="422486"/>
+            <a:off x="4423562" y="5078454"/>
+            <a:ext cx="3344570" cy="211243"/>
           </a:xfrm>
           <a:prstGeom prst="rect">
             <a:avLst/>
@@ -6076,25 +6404,25 @@
                 </a:solidFill>
                 <a:latin typeface="Arial"/>
               </a:rPr>
-              <a:t>похожесть 96,2% · новый класс 2,5% · полный цикл 1,3%</a:t>
-            </a:r>
-          </a:p>
-        </p:txBody>
-      </p:sp>
-      <p:sp>
-        <p:nvSpPr>
-          <p:cNvPr id="12" name="Rounded Rectangle 11"/>
+              <a:t>с собственными клиническими испытаниями</a:t>
+            </a:r>
+          </a:p>
+        </p:txBody>
+      </p:sp>
+      <p:sp>
+        <p:nvSpPr>
+          <p:cNvPr id="14" name="Rounded Rectangle 13"/>
           <p:cNvSpPr/>
           <p:nvPr/>
         </p:nvSpPr>
         <p:spPr>
           <a:xfrm>
-            <a:off x="8069884" y="1335024"/>
-            <a:ext cx="3618890" cy="1584468"/>
+            <a:off x="8069884" y="4261104"/>
+            <a:ext cx="3618890" cy="1165753"/>
           </a:xfrm>
           <a:prstGeom prst="roundRect">
             <a:avLst>
-              <a:gd name="adj" fmla="val 19236"/>
+              <a:gd name="adj" fmla="val 25000"/>
             </a:avLst>
           </a:prstGeom>
           <a:solidFill>
@@ -6117,13 +6445,13 @@
       </p:sp>
       <p:sp>
         <p:nvSpPr>
-          <p:cNvPr id="13" name="TextBox 12"/>
+          <p:cNvPr id="15" name="TextBox 14"/>
           <p:cNvSpPr txBox="1"/>
           <p:nvPr/>
         </p:nvSpPr>
         <p:spPr>
           <a:xfrm>
-            <a:off x="8207044" y="1472184"/>
+            <a:off x="8207044" y="4398264"/>
             <a:ext cx="3344570" cy="253191"/>
           </a:xfrm>
           <a:prstGeom prst="rect">
@@ -6149,20 +6477,20 @@
                 </a:solidFill>
                 <a:latin typeface="Arial"/>
               </a:rPr>
-              <a:t>РАДИОЛОГИЯ, ИЗ ТЕХ ЖЕ 1 614</a:t>
-            </a:r>
-          </a:p>
-        </p:txBody>
-      </p:sp>
-      <p:sp>
-        <p:nvSpPr>
-          <p:cNvPr id="14" name="TextBox 13"/>
+              <a:t>РАДИОЛОГИЯ</a:t>
+            </a:r>
+          </a:p>
+        </p:txBody>
+      </p:sp>
+      <p:sp>
+        <p:nvSpPr>
+          <p:cNvPr id="16" name="TextBox 15"/>
           <p:cNvSpPr txBox="1"/>
           <p:nvPr/>
         </p:nvSpPr>
         <p:spPr>
           <a:xfrm>
-            <a:off x="8207044" y="1725375"/>
+            <a:off x="8207044" y="4651455"/>
             <a:ext cx="3344570" cy="426999"/>
           </a:xfrm>
           <a:prstGeom prst="rect">
@@ -6188,21 +6516,21 @@
                 </a:solidFill>
                 <a:latin typeface="Arial"/>
               </a:rPr>
-              <a:t>1 230 — это 76,2%</a:t>
-            </a:r>
-          </a:p>
-        </p:txBody>
-      </p:sp>
-      <p:sp>
-        <p:nvSpPr>
-          <p:cNvPr id="15" name="TextBox 14"/>
+              <a:t>1 230 из 1 614</a:t>
+            </a:r>
+          </a:p>
+        </p:txBody>
+      </p:sp>
+      <p:sp>
+        <p:nvSpPr>
+          <p:cNvPr id="17" name="TextBox 16"/>
           <p:cNvSpPr txBox="1"/>
           <p:nvPr/>
         </p:nvSpPr>
         <p:spPr>
           <a:xfrm>
-            <a:off x="8207044" y="2152374"/>
-            <a:ext cx="3344570" cy="422486"/>
+            <a:off x="8207044" y="5078454"/>
+            <a:ext cx="3344570" cy="211243"/>
           </a:xfrm>
           <a:prstGeom prst="rect">
             <a:avLst/>
@@ -6227,25 +6555,25 @@
                 </a:solidFill>
                 <a:latin typeface="Arial"/>
               </a:rPr>
-              <a:t>кардиология 154 · неврология 73 · психиатрия 0</a:t>
-            </a:r>
-          </a:p>
-        </p:txBody>
-      </p:sp>
-      <p:sp>
-        <p:nvSpPr>
-          <p:cNvPr id="16" name="Rounded Rectangle 15"/>
+              <a:t>психиатрии ноль за всю историю</a:t>
+            </a:r>
+          </a:p>
+        </p:txBody>
+      </p:sp>
+      <p:sp>
+        <p:nvSpPr>
+          <p:cNvPr id="18" name="Rounded Rectangle 17"/>
           <p:cNvSpPr/>
           <p:nvPr/>
         </p:nvSpPr>
         <p:spPr>
           <a:xfrm>
-            <a:off x="374904" y="3010932"/>
-            <a:ext cx="11441887" cy="2412286"/>
+            <a:off x="374904" y="5518297"/>
+            <a:ext cx="11441887" cy="717910"/>
           </a:xfrm>
           <a:prstGeom prst="roundRect">
             <a:avLst>
-              <a:gd name="adj" fmla="val 12635"/>
+              <a:gd name="adj" fmla="val 25000"/>
             </a:avLst>
           </a:prstGeom>
           <a:solidFill>
@@ -6268,14 +6596,14 @@
       </p:sp>
       <p:sp>
         <p:nvSpPr>
-          <p:cNvPr id="17" name="TextBox 16"/>
+          <p:cNvPr id="19" name="TextBox 18"/>
           <p:cNvSpPr txBox="1"/>
           <p:nvPr/>
         </p:nvSpPr>
         <p:spPr>
           <a:xfrm>
-            <a:off x="539496" y="3102372"/>
-            <a:ext cx="5373471" cy="3133835"/>
+            <a:off x="539496" y="5609737"/>
+            <a:ext cx="11112703" cy="626470"/>
           </a:xfrm>
           <a:prstGeom prst="rect">
             <a:avLst/>
@@ -6290,273 +6618,27 @@
           <a:p>
             <a:pPr algn="l">
               <a:lnSpc>
-                <a:spcPct val="126000"/>
+                <a:spcPct val="118000"/>
               </a:lnSpc>
             </a:pPr>
             <a:r>
-              <a:rPr sz="1500" b="1" i="0">
+              <a:rPr sz="1400" b="1" i="0">
                 <a:solidFill>
                   <a:srgbClr val="21295C"/>
                 </a:solidFill>
                 <a:latin typeface="Arial"/>
               </a:rPr>
-              <a:t>Весь поток новых решений регулятора США за те же годы остался на месте — 1,07 раза.</a:t>
-            </a:r>
-            <a:r>
-              <a:rPr sz="1500" b="0" i="0">
+              <a:t>Российская строка считана по всему реестру, остальные — по признаку новизны.</a:t>
+            </a:r>
+            <a:r>
+              <a:rPr sz="1400" b="0" i="0">
                 <a:solidFill>
                   <a:srgbClr val="21295C"/>
                 </a:solidFill>
                 <a:latin typeface="Arial"/>
               </a:rPr>
-              <a:t> Изделия с ИИ прибавлялись сверху.</a:t>
-            </a:r>
-          </a:p>
-          <a:p>
-            <a:pPr algn="l">
-              <a:lnSpc>
-                <a:spcPct val="126000"/>
-              </a:lnSpc>
-              <a:spcBef>
-                <a:spcPts val="700"/>
-              </a:spcBef>
-            </a:pPr>
-            <a:r>
-              <a:rPr sz="1500" b="0" i="0">
-                <a:solidFill>
-                  <a:srgbClr val="21295C"/>
-                </a:solidFill>
-                <a:latin typeface="Arial"/>
-              </a:rPr>
-              <a:t/>
-            </a:r>
-            <a:r>
-              <a:rPr sz="1500" b="1" i="0">
-                <a:solidFill>
-                  <a:srgbClr val="21295C"/>
-                </a:solidFill>
-                <a:latin typeface="Arial"/>
-              </a:rPr>
-              <a:t>Допущено на миллион населения, по признаку новизны:</a:t>
-            </a:r>
-          </a:p>
-          <a:p>
-            <a:pPr algn="l">
-              <a:lnSpc>
-                <a:spcPct val="126000"/>
-              </a:lnSpc>
-              <a:spcBef>
-                <a:spcPts val="700"/>
-              </a:spcBef>
-            </a:pPr>
-            <a:r>
-              <a:rPr sz="1500" b="0" i="0">
-                <a:solidFill>
-                  <a:srgbClr val="21295C"/>
-                </a:solidFill>
-                <a:latin typeface="Arial"/>
-              </a:rPr>
-              <a:t/>
-            </a:r>
-            <a:r>
-              <a:rPr sz="1500" b="0" i="0">
-                <a:solidFill>
-                  <a:srgbClr val="21295C"/>
-                </a:solidFill>
-                <a:latin typeface="Arial"/>
-              </a:rPr>
-              <a:t>• Корея 1,70 — 88 из 549, признак: инновационный статус</a:t>
-            </a:r>
-          </a:p>
-        </p:txBody>
-      </p:sp>
-      <p:sp>
-        <p:nvSpPr>
-          <p:cNvPr id="18" name="TextBox 17"/>
-          <p:cNvSpPr txBox="1"/>
-          <p:nvPr/>
-        </p:nvSpPr>
-        <p:spPr>
-          <a:xfrm>
-            <a:off x="6278727" y="3102372"/>
-            <a:ext cx="5373471" cy="3133835"/>
-          </a:xfrm>
-          <a:prstGeom prst="rect">
-            <a:avLst/>
-          </a:prstGeom>
-          <a:noFill/>
-        </p:spPr>
-        <p:txBody>
-          <a:bodyPr wrap="square" lIns="0" rIns="0" tIns="0" bIns="0" anchor="t">
-            <a:spAutoFit/>
-          </a:bodyPr>
-          <a:lstStyle/>
-          <a:p>
-            <a:pPr algn="l">
-              <a:lnSpc>
-                <a:spcPct val="126000"/>
-              </a:lnSpc>
-            </a:pPr>
-            <a:r>
-              <a:rPr sz="1500" b="0" i="0">
-                <a:solidFill>
-                  <a:srgbClr val="21295C"/>
-                </a:solidFill>
-                <a:latin typeface="Arial"/>
-              </a:rPr>
-              <a:t>• Россия 0,39 — все 57 из реестра, разбивки нет</a:t>
-            </a:r>
-          </a:p>
-          <a:p>
-            <a:pPr algn="l">
-              <a:lnSpc>
-                <a:spcPct val="126000"/>
-              </a:lnSpc>
-              <a:spcBef>
-                <a:spcPts val="700"/>
-              </a:spcBef>
-            </a:pPr>
-            <a:r>
-              <a:rPr sz="1500" b="0" i="0">
-                <a:solidFill>
-                  <a:srgbClr val="21295C"/>
-                </a:solidFill>
-                <a:latin typeface="Arial"/>
-              </a:rPr>
-              <a:t/>
-            </a:r>
-            <a:r>
-              <a:rPr sz="1500" b="0" i="0">
-                <a:solidFill>
-                  <a:srgbClr val="21295C"/>
-                </a:solidFill>
-                <a:latin typeface="Arial"/>
-              </a:rPr>
-              <a:t>• США 0,18 — 61 из 1 614, полный цикл и новый класс</a:t>
-            </a:r>
-          </a:p>
-          <a:p>
-            <a:pPr algn="l">
-              <a:lnSpc>
-                <a:spcPct val="126000"/>
-              </a:lnSpc>
-              <a:spcBef>
-                <a:spcPts val="700"/>
-              </a:spcBef>
-            </a:pPr>
-            <a:r>
-              <a:rPr sz="1500" b="0" i="0">
-                <a:solidFill>
-                  <a:srgbClr val="21295C"/>
-                </a:solidFill>
-                <a:latin typeface="Arial"/>
-              </a:rPr>
-              <a:t/>
-            </a:r>
-            <a:r>
-              <a:rPr sz="1500" b="0" i="0">
-                <a:solidFill>
-                  <a:srgbClr val="21295C"/>
-                </a:solidFill>
-                <a:latin typeface="Arial"/>
-              </a:rPr>
-              <a:t>• Япония 0,11 — оценка, около 14 из 51</a:t>
-            </a:r>
-          </a:p>
-          <a:p>
-            <a:pPr algn="l">
-              <a:lnSpc>
-                <a:spcPct val="126000"/>
-              </a:lnSpc>
-              <a:spcBef>
-                <a:spcPts val="700"/>
-              </a:spcBef>
-            </a:pPr>
-            <a:r>
-              <a:rPr sz="1500" b="0" i="0">
-                <a:solidFill>
-                  <a:srgbClr val="21295C"/>
-                </a:solidFill>
-                <a:latin typeface="Arial"/>
-              </a:rPr>
-              <a:t/>
-            </a:r>
-            <a:r>
-              <a:rPr sz="1500" b="0" i="0">
-                <a:solidFill>
-                  <a:srgbClr val="21295C"/>
-                </a:solidFill>
-                <a:latin typeface="Arial"/>
-              </a:rPr>
-              <a:t>• Китай 0,08 — 118 из 154, своё клиническое испытание</a:t>
-            </a:r>
-          </a:p>
-          <a:p>
-            <a:pPr algn="l">
-              <a:lnSpc>
-                <a:spcPct val="126000"/>
-              </a:lnSpc>
-              <a:spcBef>
-                <a:spcPts val="700"/>
-              </a:spcBef>
-            </a:pPr>
-            <a:r>
-              <a:rPr sz="1500" b="0" i="0">
-                <a:solidFill>
-                  <a:srgbClr val="21295C"/>
-                </a:solidFill>
-                <a:latin typeface="Arial"/>
-              </a:rPr>
-              <a:t/>
-            </a:r>
-            <a:r>
-              <a:rPr sz="1500" b="1" i="0">
-                <a:solidFill>
-                  <a:srgbClr val="21295C"/>
-                </a:solidFill>
-                <a:latin typeface="Arial"/>
-              </a:rPr>
-              <a:t>Российская строка считана по всему реестру.</a:t>
-            </a:r>
-            <a:r>
-              <a:rPr sz="1500" b="0" i="0">
-                <a:solidFill>
-                  <a:srgbClr val="21295C"/>
-                </a:solidFill>
-                <a:latin typeface="Arial"/>
-              </a:rPr>
               <a:t> Один столбец собран из двух разных счётов.</a:t>
             </a:r>
-          </a:p>
-        </p:txBody>
-      </p:sp>
-      <p:sp>
-        <p:nvSpPr>
-          <p:cNvPr id="19" name="Rectangle 18"/>
-          <p:cNvSpPr/>
-          <p:nvPr/>
-        </p:nvSpPr>
-        <p:spPr>
-          <a:xfrm>
-            <a:off x="6091275" y="3102372"/>
-            <a:ext cx="9144" cy="2137966"/>
-          </a:xfrm>
-          <a:prstGeom prst="rect">
-            <a:avLst/>
-          </a:prstGeom>
-          <a:solidFill>
-            <a:srgbClr val="D9E2EC"/>
-          </a:solidFill>
-          <a:ln>
-            <a:noFill/>
-          </a:ln>
-          <a:effectLst/>
-        </p:spPr>
-        <p:txBody>
-          <a:bodyPr rtlCol="0" anchor="ctr"/>
-          <a:lstStyle/>
-          <a:p>
-            <a:pPr algn="ctr"/>
           </a:p>
         </p:txBody>
       </p:sp>
@@ -6568,7 +6650,7 @@
         </p:nvSpPr>
         <p:spPr>
           <a:xfrm>
-            <a:off x="502920" y="854141"/>
+            <a:off x="502920" y="888090"/>
             <a:ext cx="960120" cy="50292"/>
           </a:xfrm>
           <a:prstGeom prst="rect">
@@ -6641,28 +6723,9 @@
                   <a:srgbClr val="065A82"/>
                 </a:solidFill>
                 <a:latin typeface="Arial"/>
-                <a:hlinkClick r:id="rId2"/>
+                <a:hlinkClick r:id="rId3"/>
               </a:rPr>
               <a:t>счёт по таблице FDA</a:t>
-            </a:r>
-            <a:r>
-              <a:rPr sz="1200" b="0" i="1">
-                <a:solidFill>
-                  <a:srgbClr val="1C7293"/>
-                </a:solidFill>
-                <a:latin typeface="Arial"/>
-              </a:rPr>
-              <a:t> · </a:t>
-            </a:r>
-            <a:r>
-              <a:rPr sz="1200" b="0" i="1" u="sng">
-                <a:solidFill>
-                  <a:srgbClr val="065A82"/>
-                </a:solidFill>
-                <a:latin typeface="Arial"/>
-                <a:hlinkClick r:id="rId3"/>
-              </a:rPr>
-              <a:t>страновой разрез</a:t>
             </a:r>
             <a:r>
               <a:rPr sz="1200" b="0" i="1">
@@ -6680,6 +6743,25 @@
                 </a:solidFill>
                 <a:latin typeface="Arial"/>
                 <a:hlinkClick r:id="rId4"/>
+              </a:rPr>
+              <a:t>страновой разрез</a:t>
+            </a:r>
+            <a:r>
+              <a:rPr sz="1200" b="0" i="1">
+                <a:solidFill>
+                  <a:srgbClr val="1C7293"/>
+                </a:solidFill>
+                <a:latin typeface="Arial"/>
+              </a:rPr>
+              <a:t> · </a:t>
+            </a:r>
+            <a:r>
+              <a:rPr sz="1200" b="0" i="1" u="sng">
+                <a:solidFill>
+                  <a:srgbClr val="065A82"/>
+                </a:solidFill>
+                <a:latin typeface="Arial"/>
+                <a:hlinkClick r:id="rId5"/>
               </a:rPr>
               <a:t>проверка Кореи и Китая</a:t>
             </a:r>
@@ -6768,7 +6850,7 @@
                 </a:solidFill>
                 <a:latin typeface="Arial"/>
               </a:rPr>
-              <a:t>Применение ИИ в медицине: врачи, случаи за год, оплата</a:t>
+              <a:t>Применение ИИ: врачи и поток</a:t>
             </a:r>
           </a:p>
         </p:txBody>
@@ -6781,12 +6863,70 @@
         </p:nvSpPr>
         <p:spPr>
           <a:xfrm>
-            <a:off x="502920" y="1335024"/>
-            <a:ext cx="2673019" cy="1767420"/>
+            <a:off x="507847" y="1335024"/>
+            <a:ext cx="11176000" cy="2743200"/>
           </a:xfrm>
           <a:prstGeom prst="roundRect">
             <a:avLst>
-              <a:gd name="adj" fmla="val 17245"/>
+              <a:gd name="adj" fmla="val 11111"/>
+            </a:avLst>
+          </a:prstGeom>
+          <a:solidFill>
+            <a:srgbClr val="F4F7FA"/>
+          </a:solidFill>
+          <a:ln w="19050">
+            <a:solidFill>
+              <a:srgbClr val="1C7293"/>
+            </a:solidFill>
+          </a:ln>
+          <a:effectLst/>
+        </p:spPr>
+        <p:txBody>
+          <a:bodyPr rtlCol="0" anchor="ctr"/>
+          <a:lstStyle/>
+          <a:p>
+            <a:pPr algn="ctr"/>
+          </a:p>
+        </p:txBody>
+      </p:sp>
+      <p:pic>
+        <p:nvPicPr>
+          <p:cNvPr id="5" name="Picture 4" descr="s0Xc-potok-za-god.png"/>
+          <p:cNvPicPr>
+            <a:picLocks noChangeAspect="1"/>
+          </p:cNvPicPr>
+          <p:nvPr/>
+        </p:nvPicPr>
+        <p:blipFill>
+          <a:blip r:embed="rId2"/>
+          <a:stretch>
+            <a:fillRect/>
+          </a:stretch>
+        </p:blipFill>
+        <p:spPr>
+          <a:xfrm>
+            <a:off x="1066647" y="1472184"/>
+            <a:ext cx="10058400" cy="2468880"/>
+          </a:xfrm>
+          <a:prstGeom prst="rect">
+            <a:avLst/>
+          </a:prstGeom>
+        </p:spPr>
+      </p:pic>
+      <p:sp>
+        <p:nvSpPr>
+          <p:cNvPr id="6" name="Rounded Rectangle 5"/>
+          <p:cNvSpPr/>
+          <p:nvPr/>
+        </p:nvSpPr>
+        <p:spPr>
+          <a:xfrm>
+            <a:off x="502920" y="4261104"/>
+            <a:ext cx="3618890" cy="1376997"/>
+          </a:xfrm>
+          <a:prstGeom prst="roundRect">
+            <a:avLst>
+              <a:gd name="adj" fmla="val 22135"/>
             </a:avLst>
           </a:prstGeom>
           <a:solidFill>
@@ -6809,14 +6949,14 @@
       </p:sp>
       <p:sp>
         <p:nvSpPr>
-          <p:cNvPr id="5" name="TextBox 4"/>
+          <p:cNvPr id="7" name="TextBox 6"/>
           <p:cNvSpPr txBox="1"/>
           <p:nvPr/>
         </p:nvSpPr>
         <p:spPr>
           <a:xfrm>
-            <a:off x="640080" y="1472184"/>
-            <a:ext cx="2398699" cy="460662"/>
+            <a:off x="640080" y="4398264"/>
+            <a:ext cx="3344570" cy="253191"/>
           </a:xfrm>
           <a:prstGeom prst="rect">
             <a:avLst/>
@@ -6841,21 +6981,21 @@
                 </a:solidFill>
                 <a:latin typeface="Arial"/>
               </a:rPr>
-              <a:t>ВРАЧИ МИРА, ПОЛЬЗУЮТСЯ В РАБОТЕ</a:t>
-            </a:r>
-          </a:p>
-        </p:txBody>
-      </p:sp>
-      <p:sp>
-        <p:nvSpPr>
-          <p:cNvPr id="6" name="TextBox 5"/>
+              <a:t>ВРАЧИ США</a:t>
+            </a:r>
+          </a:p>
+        </p:txBody>
+      </p:sp>
+      <p:sp>
+        <p:nvSpPr>
+          <p:cNvPr id="8" name="TextBox 7"/>
           <p:cNvSpPr txBox="1"/>
           <p:nvPr/>
         </p:nvSpPr>
         <p:spPr>
           <a:xfrm>
-            <a:off x="640080" y="1932846"/>
-            <a:ext cx="2398699" cy="817422"/>
+            <a:off x="640080" y="4651455"/>
+            <a:ext cx="3344570" cy="426999"/>
           </a:xfrm>
           <a:prstGeom prst="rect">
             <a:avLst/>
@@ -6880,21 +7020,21 @@
                 </a:solidFill>
                 <a:latin typeface="Arial"/>
               </a:rPr>
-              <a:t>около 3 из 13–15 млн</a:t>
-            </a:r>
-          </a:p>
-        </p:txBody>
-      </p:sp>
-      <p:sp>
-        <p:nvSpPr>
-          <p:cNvPr id="7" name="TextBox 6"/>
+              <a:t>38% → 66%</a:t>
+            </a:r>
+          </a:p>
+        </p:txBody>
+      </p:sp>
+      <p:sp>
+        <p:nvSpPr>
+          <p:cNvPr id="9" name="TextBox 8"/>
           <p:cNvSpPr txBox="1"/>
           <p:nvPr/>
         </p:nvSpPr>
         <p:spPr>
           <a:xfrm>
-            <a:off x="640080" y="2750268"/>
-            <a:ext cx="2398699" cy="211243"/>
+            <a:off x="640080" y="5078454"/>
+            <a:ext cx="3344570" cy="211243"/>
           </a:xfrm>
           <a:prstGeom prst="rect">
             <a:avLst/>
@@ -6919,25 +7059,25 @@
                 </a:solidFill>
                 <a:latin typeface="Arial"/>
               </a:rPr>
-              <a:t>20–23%; сложено по регионам</a:t>
-            </a:r>
-          </a:p>
-        </p:txBody>
-      </p:sp>
-      <p:sp>
-        <p:nvSpPr>
-          <p:cNvPr id="8" name="Rounded Rectangle 7"/>
+              <a:t>из 1,1 млн практикующих, 2023 и 2024</a:t>
+            </a:r>
+          </a:p>
+        </p:txBody>
+      </p:sp>
+      <p:sp>
+        <p:nvSpPr>
+          <p:cNvPr id="10" name="Rounded Rectangle 9"/>
           <p:cNvSpPr/>
           <p:nvPr/>
         </p:nvSpPr>
         <p:spPr>
           <a:xfrm>
-            <a:off x="3340531" y="1335024"/>
-            <a:ext cx="2673019" cy="1767420"/>
+            <a:off x="4286402" y="4261104"/>
+            <a:ext cx="3618890" cy="1376997"/>
           </a:xfrm>
           <a:prstGeom prst="roundRect">
             <a:avLst>
-              <a:gd name="adj" fmla="val 17245"/>
+              <a:gd name="adj" fmla="val 22135"/>
             </a:avLst>
           </a:prstGeom>
           <a:solidFill>
@@ -6960,14 +7100,14 @@
       </p:sp>
       <p:sp>
         <p:nvSpPr>
-          <p:cNvPr id="9" name="TextBox 8"/>
+          <p:cNvPr id="11" name="TextBox 10"/>
           <p:cNvSpPr txBox="1"/>
           <p:nvPr/>
         </p:nvSpPr>
         <p:spPr>
           <a:xfrm>
-            <a:off x="3477691" y="1472184"/>
-            <a:ext cx="2398699" cy="253191"/>
+            <a:off x="4423562" y="4398264"/>
+            <a:ext cx="3344570" cy="253191"/>
           </a:xfrm>
           <a:prstGeom prst="rect">
             <a:avLst/>
@@ -6992,21 +7132,21 @@
                 </a:solidFill>
                 <a:latin typeface="Arial"/>
               </a:rPr>
-              <a:t>ВРАЧИ США</a:t>
-            </a:r>
-          </a:p>
-        </p:txBody>
-      </p:sp>
-      <p:sp>
-        <p:nvSpPr>
-          <p:cNvPr id="10" name="TextBox 9"/>
+              <a:t>ДОПУЩЕНО И ОПЛАЧИВАЕТСЯ</a:t>
+            </a:r>
+          </a:p>
+        </p:txBody>
+      </p:sp>
+      <p:sp>
+        <p:nvSpPr>
+          <p:cNvPr id="12" name="TextBox 11"/>
           <p:cNvSpPr txBox="1"/>
           <p:nvPr/>
         </p:nvSpPr>
         <p:spPr>
           <a:xfrm>
-            <a:off x="3477691" y="1725375"/>
-            <a:ext cx="2398699" cy="426999"/>
+            <a:off x="4423562" y="4651455"/>
+            <a:ext cx="3344570" cy="426999"/>
           </a:xfrm>
           <a:prstGeom prst="rect">
             <a:avLst/>
@@ -7031,21 +7171,21 @@
                 </a:solidFill>
                 <a:latin typeface="Arial"/>
               </a:rPr>
-              <a:t>38% → 66%</a:t>
-            </a:r>
-          </a:p>
-        </p:txBody>
-      </p:sp>
-      <p:sp>
-        <p:nvSpPr>
-          <p:cNvPr id="11" name="TextBox 10"/>
+              <a:t>3 из 1 614 · 49 из 549</a:t>
+            </a:r>
+          </a:p>
+        </p:txBody>
+      </p:sp>
+      <p:sp>
+        <p:nvSpPr>
+          <p:cNvPr id="13" name="TextBox 12"/>
           <p:cNvSpPr txBox="1"/>
           <p:nvPr/>
         </p:nvSpPr>
         <p:spPr>
           <a:xfrm>
-            <a:off x="3477691" y="2152374"/>
-            <a:ext cx="2398699" cy="422486"/>
+            <a:off x="4423562" y="5078454"/>
+            <a:ext cx="3344570" cy="422486"/>
           </a:xfrm>
           <a:prstGeom prst="rect">
             <a:avLst/>
@@ -7070,176 +7210,25 @@
                 </a:solidFill>
                 <a:latin typeface="Arial"/>
               </a:rPr>
-              <a:t>из 1,1 млн практикующих; 2023 и 2024 годы</a:t>
-            </a:r>
-          </a:p>
-        </p:txBody>
-      </p:sp>
-      <p:sp>
-        <p:nvSpPr>
-          <p:cNvPr id="12" name="Rounded Rectangle 11"/>
+              <a:t>постоянные коды оплаты, США · возмещение, Корея</a:t>
+            </a:r>
+          </a:p>
+        </p:txBody>
+      </p:sp>
+      <p:sp>
+        <p:nvSpPr>
+          <p:cNvPr id="14" name="Rounded Rectangle 13"/>
           <p:cNvSpPr/>
           <p:nvPr/>
         </p:nvSpPr>
         <p:spPr>
           <a:xfrm>
-            <a:off x="6178143" y="1335024"/>
-            <a:ext cx="2673019" cy="1767420"/>
+            <a:off x="8069884" y="4261104"/>
+            <a:ext cx="3618890" cy="1376997"/>
           </a:xfrm>
           <a:prstGeom prst="roundRect">
             <a:avLst>
-              <a:gd name="adj" fmla="val 17245"/>
-            </a:avLst>
-          </a:prstGeom>
-          <a:solidFill>
-            <a:srgbClr val="F4F7FA"/>
-          </a:solidFill>
-          <a:ln w="15240">
-            <a:solidFill>
-              <a:srgbClr val="1C7293"/>
-            </a:solidFill>
-          </a:ln>
-          <a:effectLst/>
-        </p:spPr>
-        <p:txBody>
-          <a:bodyPr rtlCol="0" anchor="ctr"/>
-          <a:lstStyle/>
-          <a:p>
-            <a:pPr algn="ctr"/>
-          </a:p>
-        </p:txBody>
-      </p:sp>
-      <p:sp>
-        <p:nvSpPr>
-          <p:cNvPr id="13" name="TextBox 12"/>
-          <p:cNvSpPr txBox="1"/>
-          <p:nvPr/>
-        </p:nvSpPr>
-        <p:spPr>
-          <a:xfrm>
-            <a:off x="6315303" y="1472184"/>
-            <a:ext cx="2398699" cy="253191"/>
-          </a:xfrm>
-          <a:prstGeom prst="rect">
-            <a:avLst/>
-          </a:prstGeom>
-          <a:noFill/>
-        </p:spPr>
-        <p:txBody>
-          <a:bodyPr wrap="square" lIns="0" rIns="0" tIns="0" bIns="0" anchor="t">
-            <a:spAutoFit/>
-          </a:bodyPr>
-          <a:lstStyle/>
-          <a:p>
-            <a:pPr algn="l">
-              <a:lnSpc>
-                <a:spcPct val="110000"/>
-              </a:lnSpc>
-            </a:pPr>
-            <a:r>
-              <a:rPr sz="1200" b="1" i="0">
-                <a:solidFill>
-                  <a:srgbClr val="1C7293"/>
-                </a:solidFill>
-                <a:latin typeface="Arial"/>
-              </a:rPr>
-              <a:t>СЛУЧАИ ЗА ГОД ЧЕРЕЗ ИИ</a:t>
-            </a:r>
-          </a:p>
-        </p:txBody>
-      </p:sp>
-      <p:sp>
-        <p:nvSpPr>
-          <p:cNvPr id="14" name="TextBox 13"/>
-          <p:cNvSpPr txBox="1"/>
-          <p:nvPr/>
-        </p:nvSpPr>
-        <p:spPr>
-          <a:xfrm>
-            <a:off x="6315303" y="1725375"/>
-            <a:ext cx="2398699" cy="817422"/>
-          </a:xfrm>
-          <a:prstGeom prst="rect">
-            <a:avLst/>
-          </a:prstGeom>
-          <a:noFill/>
-        </p:spPr>
-        <p:txBody>
-          <a:bodyPr wrap="square" lIns="0" rIns="0" tIns="0" bIns="0" anchor="t">
-            <a:spAutoFit/>
-          </a:bodyPr>
-          <a:lstStyle/>
-          <a:p>
-            <a:pPr algn="l">
-              <a:lnSpc>
-                <a:spcPct val="108000"/>
-              </a:lnSpc>
-            </a:pPr>
-            <a:r>
-              <a:rPr sz="2300" b="1" i="0">
-                <a:solidFill>
-                  <a:srgbClr val="21295C"/>
-                </a:solidFill>
-                <a:latin typeface="Arial"/>
-              </a:rPr>
-              <a:t>170–180 млн из 3,6–4,2 млрд</a:t>
-            </a:r>
-          </a:p>
-        </p:txBody>
-      </p:sp>
-      <p:sp>
-        <p:nvSpPr>
-          <p:cNvPr id="15" name="TextBox 14"/>
-          <p:cNvSpPr txBox="1"/>
-          <p:nvPr/>
-        </p:nvSpPr>
-        <p:spPr>
-          <a:xfrm>
-            <a:off x="6315303" y="2542797"/>
-            <a:ext cx="2398699" cy="422486"/>
-          </a:xfrm>
-          <a:prstGeom prst="rect">
-            <a:avLst/>
-          </a:prstGeom>
-          <a:noFill/>
-        </p:spPr>
-        <p:txBody>
-          <a:bodyPr wrap="square" lIns="0" rIns="0" tIns="0" bIns="0" anchor="t">
-            <a:spAutoFit/>
-          </a:bodyPr>
-          <a:lstStyle/>
-          <a:p>
-            <a:pPr algn="l">
-              <a:lnSpc>
-                <a:spcPct val="112000"/>
-              </a:lnSpc>
-            </a:pPr>
-            <a:r>
-              <a:rPr sz="1200" b="0" i="1">
-                <a:solidFill>
-                  <a:srgbClr val="1C7293"/>
-                </a:solidFill>
-                <a:latin typeface="Arial"/>
-              </a:rPr>
-              <a:t>2–2,4% мирового потока снимков; это пол счёта</a:t>
-            </a:r>
-          </a:p>
-        </p:txBody>
-      </p:sp>
-      <p:sp>
-        <p:nvSpPr>
-          <p:cNvPr id="16" name="Rounded Rectangle 15"/>
-          <p:cNvSpPr/>
-          <p:nvPr/>
-        </p:nvSpPr>
-        <p:spPr>
-          <a:xfrm>
-            <a:off x="9015755" y="1335024"/>
-            <a:ext cx="2673019" cy="1767420"/>
-          </a:xfrm>
-          <a:prstGeom prst="roundRect">
-            <a:avLst>
-              <a:gd name="adj" fmla="val 17245"/>
+              <a:gd name="adj" fmla="val 22135"/>
             </a:avLst>
           </a:prstGeom>
           <a:solidFill>
@@ -7262,14 +7251,14 @@
       </p:sp>
       <p:sp>
         <p:nvSpPr>
-          <p:cNvPr id="17" name="TextBox 16"/>
+          <p:cNvPr id="15" name="TextBox 14"/>
           <p:cNvSpPr txBox="1"/>
           <p:nvPr/>
         </p:nvSpPr>
         <p:spPr>
           <a:xfrm>
-            <a:off x="9152915" y="1472184"/>
-            <a:ext cx="2398699" cy="253191"/>
+            <a:off x="8207044" y="4398264"/>
+            <a:ext cx="3344570" cy="253191"/>
           </a:xfrm>
           <a:prstGeom prst="rect">
             <a:avLst/>
@@ -7294,21 +7283,21 @@
                 </a:solidFill>
                 <a:latin typeface="Arial"/>
               </a:rPr>
-              <a:t>РЕШЕНИЯ ОБ ОПЛАТЕ, США</a:t>
-            </a:r>
-          </a:p>
-        </p:txBody>
-      </p:sp>
-      <p:sp>
-        <p:nvSpPr>
-          <p:cNvPr id="18" name="TextBox 17"/>
+              <a:t>ЛЮДИ В ЗОНЕ ПОКРЫТИЯ</a:t>
+            </a:r>
+          </a:p>
+        </p:txBody>
+      </p:sp>
+      <p:sp>
+        <p:nvSpPr>
+          <p:cNvPr id="16" name="TextBox 15"/>
           <p:cNvSpPr txBox="1"/>
           <p:nvPr/>
         </p:nvSpPr>
         <p:spPr>
           <a:xfrm>
-            <a:off x="9152915" y="1725375"/>
-            <a:ext cx="2398699" cy="698597"/>
+            <a:off x="8207044" y="4651455"/>
+            <a:ext cx="3344570" cy="426999"/>
           </a:xfrm>
           <a:prstGeom prst="rect">
             <a:avLst/>
@@ -7327,27 +7316,27 @@
               </a:lnSpc>
             </a:pPr>
             <a:r>
-              <a:rPr sz="1950" b="1" i="0">
+              <a:rPr sz="2300" b="1" i="0">
                 <a:solidFill>
                   <a:srgbClr val="1C7293"/>
                 </a:solidFill>
                 <a:latin typeface="Arial"/>
               </a:rPr>
-              <a:t>53 млн на 34,1 млн застрахованных</a:t>
-            </a:r>
-          </a:p>
-        </p:txBody>
-      </p:sp>
-      <p:sp>
-        <p:nvSpPr>
-          <p:cNvPr id="19" name="TextBox 18"/>
+              <a:t>230 млн</a:t>
+            </a:r>
+          </a:p>
+        </p:txBody>
+      </p:sp>
+      <p:sp>
+        <p:nvSpPr>
+          <p:cNvPr id="17" name="TextBox 16"/>
           <p:cNvSpPr txBox="1"/>
           <p:nvPr/>
         </p:nvSpPr>
         <p:spPr>
           <a:xfrm>
-            <a:off x="9152915" y="2423973"/>
-            <a:ext cx="2398699" cy="211243"/>
+            <a:off x="8207044" y="5078454"/>
+            <a:ext cx="3344570" cy="211243"/>
           </a:xfrm>
           <a:prstGeom prst="rect">
             <a:avLst/>
@@ -7372,25 +7361,25 @@
                 </a:solidFill>
                 <a:latin typeface="Arial"/>
               </a:rPr>
-              <a:t>1,55 на человека в год</a:t>
-            </a:r>
-          </a:p>
-        </p:txBody>
-      </p:sp>
-      <p:sp>
-        <p:nvSpPr>
-          <p:cNvPr id="20" name="Rounded Rectangle 19"/>
+              <a:t>Viz.ai, 2 000 больниц; охват, не случаи</a:t>
+            </a:r>
+          </a:p>
+        </p:txBody>
+      </p:sp>
+      <p:sp>
+        <p:nvSpPr>
+          <p:cNvPr id="18" name="Rounded Rectangle 17"/>
           <p:cNvSpPr/>
           <p:nvPr/>
         </p:nvSpPr>
         <p:spPr>
           <a:xfrm>
-            <a:off x="374904" y="3193884"/>
-            <a:ext cx="11441887" cy="1848525"/>
+            <a:off x="374904" y="5729541"/>
+            <a:ext cx="11441887" cy="506666"/>
           </a:xfrm>
           <a:prstGeom prst="roundRect">
             <a:avLst>
-              <a:gd name="adj" fmla="val 16488"/>
+              <a:gd name="adj" fmla="val 25000"/>
             </a:avLst>
           </a:prstGeom>
           <a:solidFill>
@@ -7413,14 +7402,14 @@
       </p:sp>
       <p:sp>
         <p:nvSpPr>
-          <p:cNvPr id="21" name="TextBox 20"/>
+          <p:cNvPr id="19" name="TextBox 18"/>
           <p:cNvSpPr txBox="1"/>
           <p:nvPr/>
         </p:nvSpPr>
         <p:spPr>
           <a:xfrm>
-            <a:off x="539496" y="3285324"/>
-            <a:ext cx="5373471" cy="2950883"/>
+            <a:off x="539496" y="5820981"/>
+            <a:ext cx="11112703" cy="415226"/>
           </a:xfrm>
           <a:prstGeom prst="rect">
             <a:avLst/>
@@ -7435,176 +7424,33 @@
           <a:p>
             <a:pPr algn="l">
               <a:lnSpc>
-                <a:spcPct val="126000"/>
+                <a:spcPct val="118000"/>
               </a:lnSpc>
             </a:pPr>
             <a:r>
-              <a:rPr sz="1500" b="1" i="0">
+              <a:rPr sz="1400" b="1" i="0">
                 <a:solidFill>
                   <a:srgbClr val="21295C"/>
                 </a:solidFill>
                 <a:latin typeface="Arial"/>
               </a:rPr>
-              <a:t>Россия: регулярно применяют 15–25% из 770 тысяч врачей — это 115–190 тысяч.</a:t>
-            </a:r>
-            <a:r>
-              <a:rPr sz="1500" b="0" i="0">
+              <a:t>Врачи мира: 3 млн из 13–15 млн. Россия: 15–25% из 770 тысяч.</a:t>
+            </a:r>
+            <a:r>
+              <a:rPr sz="1400" b="0" i="0">
                 <a:solidFill>
                   <a:srgbClr val="21295C"/>
                 </a:solidFill>
                 <a:latin typeface="Arial"/>
               </a:rPr>
-              <a:t> Единого опроса одной методикой нет.</a:t>
-            </a:r>
-          </a:p>
-          <a:p>
-            <a:pPr algn="l">
-              <a:lnSpc>
-                <a:spcPct val="126000"/>
-              </a:lnSpc>
-              <a:spcBef>
-                <a:spcPts val="700"/>
-              </a:spcBef>
-            </a:pPr>
-            <a:r>
-              <a:rPr sz="1500" b="0" i="0">
-                <a:solidFill>
-                  <a:srgbClr val="21295C"/>
-                </a:solidFill>
-                <a:latin typeface="Arial"/>
-              </a:rPr>
-              <a:t/>
-            </a:r>
-            <a:r>
-              <a:rPr sz="1500" b="1" i="0">
-                <a:solidFill>
-                  <a:srgbClr val="21295C"/>
-                </a:solidFill>
-                <a:latin typeface="Arial"/>
-              </a:rPr>
-              <a:t>Второй счёт по США — 63% из той же базы:</a:t>
-            </a:r>
-            <a:r>
-              <a:rPr sz="1500" b="0" i="0">
-                <a:solidFill>
-                  <a:srgbClr val="21295C"/>
-                </a:solidFill>
-                <a:latin typeface="Arial"/>
-              </a:rPr>
-              <a:t> спрошено про регулярную работу в контуре.</a:t>
-            </a:r>
-          </a:p>
-        </p:txBody>
-      </p:sp>
-      <p:sp>
-        <p:nvSpPr>
-          <p:cNvPr id="22" name="TextBox 21"/>
-          <p:cNvSpPr txBox="1"/>
-          <p:nvPr/>
-        </p:nvSpPr>
-        <p:spPr>
-          <a:xfrm>
-            <a:off x="6278727" y="3285324"/>
-            <a:ext cx="5373471" cy="2950883"/>
-          </a:xfrm>
-          <a:prstGeom prst="rect">
-            <a:avLst/>
-          </a:prstGeom>
-          <a:noFill/>
-        </p:spPr>
-        <p:txBody>
-          <a:bodyPr wrap="square" lIns="0" rIns="0" tIns="0" bIns="0" anchor="t">
-            <a:spAutoFit/>
-          </a:bodyPr>
-          <a:lstStyle/>
-          <a:p>
-            <a:pPr algn="l">
-              <a:lnSpc>
-                <a:spcPct val="126000"/>
-              </a:lnSpc>
-            </a:pPr>
-            <a:r>
-              <a:rPr sz="1500" b="1" i="0">
-                <a:solidFill>
-                  <a:srgbClr val="21295C"/>
-                </a:solidFill>
-                <a:latin typeface="Arial"/>
-              </a:rPr>
-              <a:t>Допущено и оплачивается — величины разного порядка.</a:t>
-            </a:r>
-            <a:r>
-              <a:rPr sz="1500" b="0" i="0">
-                <a:solidFill>
-                  <a:srgbClr val="21295C"/>
-                </a:solidFill>
-                <a:latin typeface="Arial"/>
-              </a:rPr>
-              <a:t> США: 3 постоянных кода оплаты на 1 614 изделий. Корея: 49 из 549, это 8,9%.</a:t>
-            </a:r>
-          </a:p>
-          <a:p>
-            <a:pPr algn="l">
-              <a:lnSpc>
-                <a:spcPct val="126000"/>
-              </a:lnSpc>
-              <a:spcBef>
-                <a:spcPts val="700"/>
-              </a:spcBef>
-            </a:pPr>
-            <a:r>
-              <a:rPr sz="1500" b="0" i="0">
-                <a:solidFill>
-                  <a:srgbClr val="21295C"/>
-                </a:solidFill>
-                <a:latin typeface="Arial"/>
-              </a:rPr>
-              <a:t/>
-            </a:r>
-            <a:r>
-              <a:rPr sz="1500" b="1" i="0">
-                <a:solidFill>
-                  <a:srgbClr val="21295C"/>
-                </a:solidFill>
-                <a:latin typeface="Arial"/>
-              </a:rPr>
-              <a:t>У кого в рабочем контуре стоит модель — и кто разбирает её отказы?</a:t>
-            </a:r>
-          </a:p>
-        </p:txBody>
-      </p:sp>
-      <p:sp>
-        <p:nvSpPr>
-          <p:cNvPr id="23" name="Rectangle 22"/>
-          <p:cNvSpPr/>
-          <p:nvPr/>
-        </p:nvSpPr>
-        <p:spPr>
-          <a:xfrm>
-            <a:off x="6091275" y="3285324"/>
-            <a:ext cx="9144" cy="1574205"/>
-          </a:xfrm>
-          <a:prstGeom prst="rect">
-            <a:avLst/>
-          </a:prstGeom>
-          <a:solidFill>
-            <a:srgbClr val="D9E2EC"/>
-          </a:solidFill>
-          <a:ln>
-            <a:noFill/>
-          </a:ln>
-          <a:effectLst/>
-        </p:spPr>
-        <p:txBody>
-          <a:bodyPr rtlCol="0" anchor="ctr"/>
-          <a:lstStyle/>
-          <a:p>
-            <a:pPr algn="ctr"/>
-          </a:p>
-        </p:txBody>
-      </p:sp>
-      <p:sp>
-        <p:nvSpPr>
-          <p:cNvPr id="24" name="Rectangle 23"/>
+              <a:t> У кого в контуре стоит модель — и кто разбирает её отказы?</a:t>
+            </a:r>
+          </a:p>
+        </p:txBody>
+      </p:sp>
+      <p:sp>
+        <p:nvSpPr>
+          <p:cNvPr id="20" name="Rectangle 19"/>
           <p:cNvSpPr/>
           <p:nvPr/>
         </p:nvSpPr>
@@ -7634,7 +7480,7 @@
       </p:sp>
       <p:sp>
         <p:nvSpPr>
-          <p:cNvPr id="25" name="TextBox 24"/>
+          <p:cNvPr id="21" name="TextBox 20"/>
           <p:cNvSpPr txBox="1"/>
           <p:nvPr/>
         </p:nvSpPr>
@@ -7683,7 +7529,7 @@
                   <a:srgbClr val="065A82"/>
                 </a:solidFill>
                 <a:latin typeface="Arial"/>
-                <a:hlinkClick r:id="rId2"/>
+                <a:hlinkClick r:id="rId3"/>
               </a:rPr>
               <a:t>агрегаты внедрения</a:t>
             </a:r>
@@ -7702,7 +7548,7 @@
                   <a:srgbClr val="065A82"/>
                 </a:solidFill>
                 <a:latin typeface="Arial"/>
-                <a:hlinkClick r:id="rId3"/>
+                <a:hlinkClick r:id="rId4"/>
               </a:rPr>
               <a:t>использование и эффект</a:t>
             </a:r>

--- a/library/lectures/lec-07/rework/deck/tri-kadra-dopuska.pptx
+++ b/library/lectures/lec-07/rework/deck/tri-kadra-dopuska.pptx
@@ -6569,7 +6569,7 @@
         <p:spPr>
           <a:xfrm>
             <a:off x="374904" y="5518297"/>
-            <a:ext cx="11441887" cy="717910"/>
+            <a:ext cx="11441887" cy="579009"/>
           </a:xfrm>
           <a:prstGeom prst="roundRect">
             <a:avLst>

--- a/library/lectures/lec-07/rework/deck/tri-kadra-dopuska.pptx
+++ b/library/lectures/lec-07/rework/deck/tri-kadra-dopuska.pptx
@@ -574,6 +574,16 @@
           </a:p>
           <a:p>
             <a:r>
+              <a:t>Сумма на кадре, 0,6–3 млн рублей по классам от первого до третьего, — не пошлина, а полная стоимость регистрации «под ключ». Это коммерческая оценка регистраторов-посредников, а не тариф регулятора: сама пошлина входит в неё лишь частью, остальное — услуги лаборатории, токсикологов и подготовки досье. Официального норматива на полную стоимость нет, потому что ВНИИИМТ не публикует сводный прейскурант в рублях по всем классам в одном месте.</a:t>
+            </a:r>
+          </a:p>
+          <a:p>
+            <a:r>
+              <a:t/>
+            </a:r>
+          </a:p>
+          <a:p>
+            <a:r>
               <a:t>Две оговорки на день чтения. Приказ № 885н сменяется с 1 сентября 2026 года приказом № 421н; по сводкам основания для испытаний с участием человека там сформулированы тем же способом, но полный текст стоит взять напрямую. Американские пошлины взяты из отраслевых сводок тарифной сетки, а не из акта регулятора, и за год они выросли на 7,1% — у обеих категорий.</a:t>
             </a:r>
           </a:p>
@@ -783,7 +793,7 @@
           </a:p>
           <a:p>
             <a:r>
-              <a:t>Российская строка стоит на другом признаке, и это надо сказать залу прямо. Росздравнадзор не публикует разбивку «сколько изделий прошли испытания с участием человека, а сколько оценку по документам», поэтому в числителе стоят все 57 зарегистрированных изделий, а на 146 миллионов населения это даёт 0,39. Признак новизны к ним не применён — его нечем применить. Достоверно известно про первые два российских изделия 2020 года, Webiomed и Botkin.AI: аналогов в реестре у них не было, и оба прошли полноценные клинические испытания с участием пациентов. К 2026 году в реестре накопилось больше десяти продуктов анализа медицинских изображений, и для новых заявок той же товарной категории доказательная база по документам уже существует. Значит, строка 0,39 сравнима с остальными по способу счёта только условно, и приравнивать 57 российских изделий к 57 «реально новым» в американском смысле неверно.</a:t>
+              <a:t>Российская строка стоит на другом признаке, и это надо сказать залу прямо. Росздравнадзор не публикует разбивку «сколько изделий прошли испытания с участием человека, а сколько оценку по документам», поэтому в числителе стоят все 57 зарегистрированных изделий, а на 146 миллионов населения это даёт 0,39. Признак новизны к ним не применён — его нечем применить. Достоверно известно про первые два российских изделия 2020 года, Webiomed и Botkin.AI: аналогов в реестре у них не было, и оба прошли полноценные клинические испытания с участием пациентов. К 2026 году в реестре накопилось больше десяти продуктов анализа медицинских изображений, и для новых заявок той же товарной категории доказательная база по документам уже существует. Значит, строка 0,39 сравнима с остальными по способу счёта только условно, и приравнивать 57 российских изделий к 57 «реально новым» в американском смысле неверно. На рейтинге рядом стоит столбец, собранный из двух разных счётов: четыре строки — по признаку новизны, одна — по всему реестру.</a:t>
             </a:r>
           </a:p>
           <a:p>
@@ -4225,11 +4235,11 @@
         <p:spPr>
           <a:xfrm>
             <a:off x="502920" y="1335024"/>
-            <a:ext cx="5510631" cy="1376997"/>
+            <a:ext cx="5510631" cy="1165753"/>
           </a:xfrm>
           <a:prstGeom prst="roundRect">
             <a:avLst>
-              <a:gd name="adj" fmla="val 22135"/>
+              <a:gd name="adj" fmla="val 25000"/>
             </a:avLst>
           </a:prstGeom>
           <a:solidFill>
@@ -4376,11 +4386,11 @@
         <p:spPr>
           <a:xfrm>
             <a:off x="6178143" y="1335024"/>
-            <a:ext cx="5510631" cy="1376997"/>
+            <a:ext cx="5510631" cy="1165753"/>
           </a:xfrm>
           <a:prstGeom prst="roundRect">
             <a:avLst>
-              <a:gd name="adj" fmla="val 22135"/>
+              <a:gd name="adj" fmla="val 25000"/>
             </a:avLst>
           </a:prstGeom>
           <a:solidFill>
@@ -4488,7 +4498,7 @@
         <p:spPr>
           <a:xfrm>
             <a:off x="6315303" y="2152374"/>
-            <a:ext cx="5236311" cy="422486"/>
+            <a:ext cx="5236311" cy="211243"/>
           </a:xfrm>
           <a:prstGeom prst="rect">
             <a:avLst/>
@@ -4513,7 +4523,7 @@
                 </a:solidFill>
                 <a:latin typeface="Arial"/>
               </a:rPr>
-              <a:t>класс 1 → класс 3; госпошлина 72–184 тысячи — её часть. Оценка регистратора</a:t>
+              <a:t>класс 1 → класс 3</a:t>
             </a:r>
           </a:p>
         </p:txBody>
@@ -4526,7 +4536,7 @@
         </p:nvSpPr>
         <p:spPr>
           <a:xfrm>
-            <a:off x="502920" y="2931477"/>
+            <a:off x="502920" y="2720233"/>
             <a:ext cx="1307592" cy="402240"/>
           </a:xfrm>
           <a:prstGeom prst="rect">
@@ -4565,7 +4575,7 @@
         </p:nvSpPr>
         <p:spPr>
           <a:xfrm>
-            <a:off x="1920240" y="2894901"/>
+            <a:off x="1920240" y="2683657"/>
             <a:ext cx="3073298" cy="475392"/>
           </a:xfrm>
           <a:prstGeom prst="roundRect">
@@ -4599,7 +4609,7 @@
         </p:nvSpPr>
         <p:spPr>
           <a:xfrm>
-            <a:off x="2002536" y="2940621"/>
+            <a:off x="2002536" y="2729377"/>
             <a:ext cx="2908706" cy="383952"/>
           </a:xfrm>
           <a:prstGeom prst="rect">
@@ -4638,7 +4648,7 @@
         </p:nvSpPr>
         <p:spPr>
           <a:xfrm>
-            <a:off x="5039258" y="3064017"/>
+            <a:off x="5039258" y="2852774"/>
             <a:ext cx="182880" cy="137160"/>
           </a:xfrm>
           <a:prstGeom prst="rightArrow">
@@ -4668,7 +4678,7 @@
         </p:nvSpPr>
         <p:spPr>
           <a:xfrm>
-            <a:off x="5267858" y="2894901"/>
+            <a:off x="5267858" y="2683657"/>
             <a:ext cx="3073298" cy="475392"/>
           </a:xfrm>
           <a:prstGeom prst="roundRect">
@@ -4702,7 +4712,7 @@
         </p:nvSpPr>
         <p:spPr>
           <a:xfrm>
-            <a:off x="5350154" y="2940621"/>
+            <a:off x="5350154" y="2729377"/>
             <a:ext cx="2908706" cy="383952"/>
           </a:xfrm>
           <a:prstGeom prst="rect">
@@ -4741,7 +4751,7 @@
         </p:nvSpPr>
         <p:spPr>
           <a:xfrm>
-            <a:off x="8386876" y="3064017"/>
+            <a:off x="8386876" y="2852774"/>
             <a:ext cx="182880" cy="137160"/>
           </a:xfrm>
           <a:prstGeom prst="rightArrow">
@@ -4771,7 +4781,7 @@
         </p:nvSpPr>
         <p:spPr>
           <a:xfrm>
-            <a:off x="8615476" y="2894901"/>
+            <a:off x="8615476" y="2683657"/>
             <a:ext cx="3073298" cy="475392"/>
           </a:xfrm>
           <a:prstGeom prst="roundRect">
@@ -4805,7 +4815,7 @@
         </p:nvSpPr>
         <p:spPr>
           <a:xfrm>
-            <a:off x="8697772" y="2940621"/>
+            <a:off x="8697772" y="2729377"/>
             <a:ext cx="2908706" cy="383952"/>
           </a:xfrm>
           <a:prstGeom prst="rect">
@@ -4844,7 +4854,7 @@
         </p:nvSpPr>
         <p:spPr>
           <a:xfrm>
-            <a:off x="502920" y="3553174"/>
+            <a:off x="502920" y="3341930"/>
             <a:ext cx="1307592" cy="402240"/>
           </a:xfrm>
           <a:prstGeom prst="rect">
@@ -4883,7 +4893,7 @@
         </p:nvSpPr>
         <p:spPr>
           <a:xfrm>
-            <a:off x="1920240" y="3516598"/>
+            <a:off x="1920240" y="3305354"/>
             <a:ext cx="2236393" cy="475392"/>
           </a:xfrm>
           <a:prstGeom prst="roundRect">
@@ -4917,7 +4927,7 @@
         </p:nvSpPr>
         <p:spPr>
           <a:xfrm>
-            <a:off x="2002536" y="3562318"/>
+            <a:off x="2002536" y="3351074"/>
             <a:ext cx="2071801" cy="383952"/>
           </a:xfrm>
           <a:prstGeom prst="rect">
@@ -4956,7 +4966,7 @@
         </p:nvSpPr>
         <p:spPr>
           <a:xfrm>
-            <a:off x="4202353" y="3685714"/>
+            <a:off x="4202353" y="3474471"/>
             <a:ext cx="182880" cy="137160"/>
           </a:xfrm>
           <a:prstGeom prst="rightArrow">
@@ -4986,7 +4996,7 @@
         </p:nvSpPr>
         <p:spPr>
           <a:xfrm>
-            <a:off x="4430953" y="3516598"/>
+            <a:off x="4430953" y="3305354"/>
             <a:ext cx="2236393" cy="475392"/>
           </a:xfrm>
           <a:prstGeom prst="roundRect">
@@ -5020,7 +5030,7 @@
         </p:nvSpPr>
         <p:spPr>
           <a:xfrm>
-            <a:off x="4513249" y="3562318"/>
+            <a:off x="4513249" y="3351074"/>
             <a:ext cx="2071801" cy="383952"/>
           </a:xfrm>
           <a:prstGeom prst="rect">
@@ -5059,7 +5069,7 @@
         </p:nvSpPr>
         <p:spPr>
           <a:xfrm>
-            <a:off x="6713067" y="3685714"/>
+            <a:off x="6713067" y="3474471"/>
             <a:ext cx="182880" cy="137160"/>
           </a:xfrm>
           <a:prstGeom prst="rightArrow">
@@ -5089,7 +5099,7 @@
         </p:nvSpPr>
         <p:spPr>
           <a:xfrm>
-            <a:off x="6941667" y="3516598"/>
+            <a:off x="6941667" y="3305354"/>
             <a:ext cx="2236393" cy="475392"/>
           </a:xfrm>
           <a:prstGeom prst="roundRect">
@@ -5123,7 +5133,7 @@
         </p:nvSpPr>
         <p:spPr>
           <a:xfrm>
-            <a:off x="7023963" y="3562318"/>
+            <a:off x="7023963" y="3351074"/>
             <a:ext cx="2071801" cy="383952"/>
           </a:xfrm>
           <a:prstGeom prst="rect">
@@ -5162,7 +5172,7 @@
         </p:nvSpPr>
         <p:spPr>
           <a:xfrm>
-            <a:off x="9223781" y="3685714"/>
+            <a:off x="9223781" y="3474471"/>
             <a:ext cx="182880" cy="137160"/>
           </a:xfrm>
           <a:prstGeom prst="rightArrow">
@@ -5192,7 +5202,7 @@
         </p:nvSpPr>
         <p:spPr>
           <a:xfrm>
-            <a:off x="9452381" y="3516598"/>
+            <a:off x="9452381" y="3305354"/>
             <a:ext cx="2236393" cy="475392"/>
           </a:xfrm>
           <a:prstGeom prst="roundRect">
@@ -5226,7 +5236,7 @@
         </p:nvSpPr>
         <p:spPr>
           <a:xfrm>
-            <a:off x="9534677" y="3562318"/>
+            <a:off x="9534677" y="3351074"/>
             <a:ext cx="2071801" cy="383952"/>
           </a:xfrm>
           <a:prstGeom prst="rect">
@@ -5265,7 +5275,7 @@
         </p:nvSpPr>
         <p:spPr>
           <a:xfrm>
-            <a:off x="502920" y="4174871"/>
+            <a:off x="502920" y="3963627"/>
             <a:ext cx="1307592" cy="402240"/>
           </a:xfrm>
           <a:prstGeom prst="rect">
@@ -5304,7 +5314,7 @@
         </p:nvSpPr>
         <p:spPr>
           <a:xfrm>
-            <a:off x="1920240" y="4138295"/>
+            <a:off x="1920240" y="3927051"/>
             <a:ext cx="2236393" cy="475392"/>
           </a:xfrm>
           <a:prstGeom prst="roundRect">
@@ -5338,7 +5348,7 @@
         </p:nvSpPr>
         <p:spPr>
           <a:xfrm>
-            <a:off x="2002536" y="4184015"/>
+            <a:off x="2002536" y="3972771"/>
             <a:ext cx="2071801" cy="383952"/>
           </a:xfrm>
           <a:prstGeom prst="rect">
@@ -5377,7 +5387,7 @@
         </p:nvSpPr>
         <p:spPr>
           <a:xfrm>
-            <a:off x="4202353" y="4307411"/>
+            <a:off x="4202353" y="4096168"/>
             <a:ext cx="182880" cy="137160"/>
           </a:xfrm>
           <a:prstGeom prst="rightArrow">
@@ -5407,7 +5417,7 @@
         </p:nvSpPr>
         <p:spPr>
           <a:xfrm>
-            <a:off x="4430953" y="4138295"/>
+            <a:off x="4430953" y="3927051"/>
             <a:ext cx="2236393" cy="475392"/>
           </a:xfrm>
           <a:prstGeom prst="roundRect">
@@ -5441,7 +5451,7 @@
         </p:nvSpPr>
         <p:spPr>
           <a:xfrm>
-            <a:off x="4513249" y="4184015"/>
+            <a:off x="4513249" y="3972771"/>
             <a:ext cx="2071801" cy="383952"/>
           </a:xfrm>
           <a:prstGeom prst="rect">
@@ -5480,7 +5490,7 @@
         </p:nvSpPr>
         <p:spPr>
           <a:xfrm>
-            <a:off x="6713067" y="4307411"/>
+            <a:off x="6713067" y="4096168"/>
             <a:ext cx="182880" cy="137160"/>
           </a:xfrm>
           <a:prstGeom prst="rightArrow">
@@ -5510,7 +5520,7 @@
         </p:nvSpPr>
         <p:spPr>
           <a:xfrm>
-            <a:off x="6941667" y="4138295"/>
+            <a:off x="6941667" y="3927051"/>
             <a:ext cx="2236393" cy="475392"/>
           </a:xfrm>
           <a:prstGeom prst="roundRect">
@@ -5544,7 +5554,7 @@
         </p:nvSpPr>
         <p:spPr>
           <a:xfrm>
-            <a:off x="7023963" y="4184015"/>
+            <a:off x="7023963" y="3972771"/>
             <a:ext cx="2071801" cy="383952"/>
           </a:xfrm>
           <a:prstGeom prst="rect">
@@ -5583,7 +5593,7 @@
         </p:nvSpPr>
         <p:spPr>
           <a:xfrm>
-            <a:off x="9223781" y="4307411"/>
+            <a:off x="9223781" y="4096168"/>
             <a:ext cx="182880" cy="137160"/>
           </a:xfrm>
           <a:prstGeom prst="rightArrow">
@@ -5613,7 +5623,7 @@
         </p:nvSpPr>
         <p:spPr>
           <a:xfrm>
-            <a:off x="9452381" y="4138295"/>
+            <a:off x="9452381" y="3927051"/>
             <a:ext cx="2236393" cy="475392"/>
           </a:xfrm>
           <a:prstGeom prst="roundRect">
@@ -5647,7 +5657,7 @@
         </p:nvSpPr>
         <p:spPr>
           <a:xfrm>
-            <a:off x="9534677" y="4184015"/>
+            <a:off x="9534677" y="3972771"/>
             <a:ext cx="2071801" cy="383952"/>
           </a:xfrm>
           <a:prstGeom prst="rect">
@@ -5686,7 +5696,7 @@
         </p:nvSpPr>
         <p:spPr>
           <a:xfrm>
-            <a:off x="502920" y="4650264"/>
+            <a:off x="502920" y="4439020"/>
             <a:ext cx="11185855" cy="211243"/>
           </a:xfrm>
           <a:prstGeom prst="rect">
@@ -5725,12 +5735,12 @@
         </p:nvSpPr>
         <p:spPr>
           <a:xfrm>
-            <a:off x="374904" y="4952947"/>
-            <a:ext cx="11441887" cy="1165285"/>
+            <a:off x="374904" y="4741704"/>
+            <a:ext cx="11441887" cy="1494503"/>
           </a:xfrm>
           <a:prstGeom prst="roundRect">
             <a:avLst>
-              <a:gd name="adj" fmla="val 25000"/>
+              <a:gd name="adj" fmla="val 20394"/>
             </a:avLst>
           </a:prstGeom>
           <a:solidFill>
@@ -5759,8 +5769,8 @@
         </p:nvSpPr>
         <p:spPr>
           <a:xfrm>
-            <a:off x="539496" y="5044387"/>
-            <a:ext cx="11112703" cy="1191820"/>
+            <a:off x="539496" y="4833144"/>
+            <a:ext cx="11112703" cy="1403063"/>
           </a:xfrm>
           <a:prstGeom prst="rect">
             <a:avLst/>
@@ -5779,7 +5789,7 @@
               </a:lnSpc>
             </a:pPr>
             <a:r>
-              <a:rPr sz="1350" b="1" i="0">
+              <a:rPr sz="1500" b="1" i="0">
                 <a:solidFill>
                   <a:srgbClr val="21295C"/>
                 </a:solidFill>
@@ -5788,7 +5798,7 @@
               <a:t>Без регистрационного удостоверения изделие нельзя ни применить на человеке, ни купить за бюджетные деньги.</a:t>
             </a:r>
             <a:r>
-              <a:rPr sz="1350" b="0" i="0">
+              <a:rPr sz="1500" b="0" i="0">
                 <a:solidFill>
                   <a:srgbClr val="21295C"/>
                 </a:solidFill>
@@ -5807,7 +5817,7 @@
               </a:spcBef>
             </a:pPr>
             <a:r>
-              <a:rPr sz="1350" b="0" i="0">
+              <a:rPr sz="1500" b="0" i="0">
                 <a:solidFill>
                   <a:srgbClr val="21295C"/>
                 </a:solidFill>
@@ -5816,7 +5826,7 @@
               <a:t/>
             </a:r>
             <a:r>
-              <a:rPr sz="1350" b="1" i="0">
+              <a:rPr sz="1500" b="1" i="0">
                 <a:solidFill>
                   <a:srgbClr val="21295C"/>
                 </a:solidFill>
@@ -5825,7 +5835,7 @@
               <a:t>Короткий путь — заявление о похожести на уже допущенное изделие:</a:t>
             </a:r>
             <a:r>
-              <a:rPr sz="1350" b="0" i="0">
+              <a:rPr sz="1500" b="0" i="0">
                 <a:solidFill>
                   <a:srgbClr val="21295C"/>
                 </a:solidFill>
@@ -6569,7 +6579,7 @@
         <p:spPr>
           <a:xfrm>
             <a:off x="374904" y="5518297"/>
-            <a:ext cx="11441887" cy="579009"/>
+            <a:ext cx="11441887" cy="717910"/>
           </a:xfrm>
           <a:prstGeom prst="roundRect">
             <a:avLst>
@@ -6628,7 +6638,7 @@
                 </a:solidFill>
                 <a:latin typeface="Arial"/>
               </a:rPr>
-              <a:t>Российская строка считана по всему реестру, остальные — по признаку новизны.</a:t>
+              <a:t>Рост держится на одном уровне — 3,1 по-настоящему новых изделия в год, без ускорения.</a:t>
             </a:r>
             <a:r>
               <a:rPr sz="1400" b="0" i="0">
@@ -6637,7 +6647,7 @@
                 </a:solidFill>
                 <a:latin typeface="Arial"/>
               </a:rPr>
-              <a:t> Один столбец собран из двух разных счётов.</a:t>
+              <a:t> Весь остальной прирост массива идёт через похожесть на предшественник.</a:t>
             </a:r>
           </a:p>
         </p:txBody>
